--- a/exec-deck/output/H&L Weekly Update - WC 28 Sep 2026.pptx
+++ b/exec-deck/output/H&L Weekly Update - WC 28 Sep 2026.pptx
@@ -25408,7 +25408,7 @@
                 <a:ea typeface="Poppins" pitchFamily="34" charset="-122"/>
                 <a:cs typeface="Poppins" pitchFamily="34" charset="-120"/>
               </a:rPr>
-              <a:t>billable utilisation 26.0% — 88.9h of 342h, but one 50.5h record carries most of it; 11.2% without it</a:t>
+              <a:t>billable utilisation 33.4% — 88.9h of 266h with Rhys and Rodney on leave, but one 50.5h record carries most of it; 14.4% without it</a:t>
             </a:r>
             <a:endParaRPr lang="en-US" sz="900" dirty="0"/>
           </a:p>
@@ -39300,7 +39300,7 @@
                 <a:ea typeface="Poppins" pitchFamily="34" charset="-122"/>
                 <a:cs typeface="Poppins" pitchFamily="34" charset="-120"/>
               </a:rPr>
-              <a:t>26%</a:t>
+              <a:t>33.4%</a:t>
             </a:r>
             <a:endParaRPr lang="en-US" sz="2600" dirty="0"/>
           </a:p>
@@ -39339,7 +39339,7 @@
                 <a:ea typeface="Poppins" pitchFamily="34" charset="-122"/>
                 <a:cs typeface="Poppins" pitchFamily="34" charset="-120"/>
               </a:rPr>
-              <a:t>88.87h billed of 342h available · target 80% · one 50.5h record carries most of it</a:t>
+              <a:t>88.87h billed of 266h available · target 80% · one 50.5h record carries most of it</a:t>
             </a:r>
             <a:endParaRPr lang="en-US" sz="780" dirty="0"/>
           </a:p>
@@ -39446,7 +39446,7 @@
                 <a:ea typeface="Poppins" pitchFamily="34" charset="-122"/>
                 <a:cs typeface="Poppins" pitchFamily="34" charset="-120"/>
               </a:rPr>
-              <a:t>342h</a:t>
+              <a:t>266h</a:t>
             </a:r>
             <a:endParaRPr lang="en-US" sz="2600" dirty="0"/>
           </a:p>
@@ -39485,7 +39485,7 @@
                 <a:ea typeface="Poppins" pitchFamily="34" charset="-122"/>
                 <a:cs typeface="Poppins" pitchFamily="34" charset="-120"/>
               </a:rPr>
-              <a:t>9 people assigned to PS-pipeline tickets × 38h standard week</a:t>
+              <a:t>7 available × 38h · Rhys Woolcock and Rodney Nolan on leave</a:t>
             </a:r>
             <a:endParaRPr lang="en-US" sz="780" dirty="0"/>
           </a:p>
@@ -39923,7 +39923,7 @@
         <p:spPr>
           <a:xfrm>
             <a:off x="2944368" y="3017520"/>
-            <a:ext cx="5486" cy="1744675"/>
+            <a:ext cx="5486" cy="1664208"/>
           </a:xfrm>
           <a:prstGeom prst="rect">
             <a:avLst/>
@@ -39982,7 +39982,7 @@
         <p:spPr>
           <a:xfrm>
             <a:off x="3419856" y="3017520"/>
-            <a:ext cx="5486" cy="1744675"/>
+            <a:ext cx="5486" cy="1664208"/>
           </a:xfrm>
           <a:prstGeom prst="rect">
             <a:avLst/>
@@ -40041,7 +40041,7 @@
         <p:spPr>
           <a:xfrm>
             <a:off x="3895344" y="3017520"/>
-            <a:ext cx="5486" cy="1744675"/>
+            <a:ext cx="5486" cy="1664208"/>
           </a:xfrm>
           <a:prstGeom prst="rect">
             <a:avLst/>
@@ -40100,7 +40100,7 @@
         <p:spPr>
           <a:xfrm>
             <a:off x="4370832" y="3017520"/>
-            <a:ext cx="5486" cy="1744675"/>
+            <a:ext cx="5486" cy="1664208"/>
           </a:xfrm>
           <a:prstGeom prst="rect">
             <a:avLst/>
@@ -40159,7 +40159,7 @@
         <p:spPr>
           <a:xfrm>
             <a:off x="4846320" y="3017520"/>
-            <a:ext cx="5486" cy="1744675"/>
+            <a:ext cx="5486" cy="1664208"/>
           </a:xfrm>
           <a:prstGeom prst="rect">
             <a:avLst/>
@@ -40179,7 +40179,7 @@
         <p:spPr>
           <a:xfrm>
             <a:off x="640080" y="3054096"/>
-            <a:ext cx="1783080" cy="193853"/>
+            <a:ext cx="1783080" cy="237744"/>
           </a:xfrm>
           <a:prstGeom prst="rect">
             <a:avLst/>
@@ -40217,7 +40217,7 @@
         </p:nvSpPr>
         <p:spPr>
           <a:xfrm>
-            <a:off x="2468880" y="3121304"/>
+            <a:off x="2468880" y="3143250"/>
             <a:ext cx="2377440" cy="59436"/>
           </a:xfrm>
           <a:prstGeom prst="roundRect">
@@ -40239,7 +40239,7 @@
         </p:nvSpPr>
         <p:spPr>
           <a:xfrm>
-            <a:off x="2468880" y="3121304"/>
+            <a:off x="2468880" y="3143250"/>
             <a:ext cx="2377440" cy="59436"/>
           </a:xfrm>
           <a:prstGeom prst="roundRect">
@@ -40262,7 +40262,7 @@
         <p:spPr>
           <a:xfrm>
             <a:off x="5029200" y="3054096"/>
-            <a:ext cx="822960" cy="193853"/>
+            <a:ext cx="822960" cy="237744"/>
           </a:xfrm>
           <a:prstGeom prst="rect">
             <a:avLst/>
@@ -40301,7 +40301,7 @@
         <p:spPr>
           <a:xfrm>
             <a:off x="5943600" y="3054096"/>
-            <a:ext cx="822960" cy="193853"/>
+            <a:ext cx="822960" cy="237744"/>
           </a:xfrm>
           <a:prstGeom prst="rect">
             <a:avLst/>
@@ -40339,8 +40339,8 @@
         </p:nvSpPr>
         <p:spPr>
           <a:xfrm>
-            <a:off x="640080" y="3247949"/>
-            <a:ext cx="1783080" cy="193853"/>
+            <a:off x="640080" y="3291840"/>
+            <a:ext cx="1783080" cy="237744"/>
           </a:xfrm>
           <a:prstGeom prst="rect">
             <a:avLst/>
@@ -40378,7 +40378,7 @@
         </p:nvSpPr>
         <p:spPr>
           <a:xfrm>
-            <a:off x="2468880" y="3315157"/>
+            <a:off x="2468880" y="3380994"/>
             <a:ext cx="2377440" cy="59436"/>
           </a:xfrm>
           <a:prstGeom prst="roundRect">
@@ -40400,7 +40400,7 @@
         </p:nvSpPr>
         <p:spPr>
           <a:xfrm>
-            <a:off x="2468880" y="3315157"/>
+            <a:off x="2468880" y="3380994"/>
             <a:ext cx="2370308" cy="59436"/>
           </a:xfrm>
           <a:prstGeom prst="roundRect">
@@ -40422,8 +40422,8 @@
         </p:nvSpPr>
         <p:spPr>
           <a:xfrm>
-            <a:off x="5029200" y="3247949"/>
-            <a:ext cx="822960" cy="193853"/>
+            <a:off x="5029200" y="3291840"/>
+            <a:ext cx="822960" cy="237744"/>
           </a:xfrm>
           <a:prstGeom prst="rect">
             <a:avLst/>
@@ -40461,8 +40461,8 @@
         </p:nvSpPr>
         <p:spPr>
           <a:xfrm>
-            <a:off x="5943600" y="3247949"/>
-            <a:ext cx="822960" cy="193853"/>
+            <a:off x="5943600" y="3291840"/>
+            <a:ext cx="822960" cy="237744"/>
           </a:xfrm>
           <a:prstGeom prst="rect">
             <a:avLst/>
@@ -40500,8 +40500,8 @@
         </p:nvSpPr>
         <p:spPr>
           <a:xfrm>
-            <a:off x="640080" y="3441802"/>
-            <a:ext cx="1783080" cy="193853"/>
+            <a:off x="640080" y="3529584"/>
+            <a:ext cx="1783080" cy="237744"/>
           </a:xfrm>
           <a:prstGeom prst="rect">
             <a:avLst/>
@@ -40525,7 +40525,7 @@
                 <a:ea typeface="Poppins" pitchFamily="34" charset="-122"/>
                 <a:cs typeface="Poppins" pitchFamily="34" charset="-120"/>
               </a:rPr>
-              <a:t>Rhys Woolcock</a:t>
+              <a:t>Isaac Mercado</a:t>
             </a:r>
             <a:endParaRPr lang="en-US" sz="800" dirty="0"/>
           </a:p>
@@ -40539,7 +40539,7 @@
         </p:nvSpPr>
         <p:spPr>
           <a:xfrm>
-            <a:off x="2468880" y="3509010"/>
+            <a:off x="2468880" y="3618738"/>
             <a:ext cx="2377440" cy="59436"/>
           </a:xfrm>
           <a:prstGeom prst="roundRect">
@@ -40561,8 +40561,8 @@
         </p:nvSpPr>
         <p:spPr>
           <a:xfrm>
-            <a:off x="5029200" y="3441802"/>
-            <a:ext cx="822960" cy="193853"/>
+            <a:off x="5029200" y="3529584"/>
+            <a:ext cx="822960" cy="237744"/>
           </a:xfrm>
           <a:prstGeom prst="rect">
             <a:avLst/>
@@ -40600,8 +40600,8 @@
         </p:nvSpPr>
         <p:spPr>
           <a:xfrm>
-            <a:off x="5943600" y="3441802"/>
-            <a:ext cx="822960" cy="193853"/>
+            <a:off x="5943600" y="3529584"/>
+            <a:ext cx="822960" cy="237744"/>
           </a:xfrm>
           <a:prstGeom prst="rect">
             <a:avLst/>
@@ -40639,8 +40639,8 @@
         </p:nvSpPr>
         <p:spPr>
           <a:xfrm>
-            <a:off x="640080" y="3635654"/>
-            <a:ext cx="1783080" cy="193853"/>
+            <a:off x="640080" y="3767328"/>
+            <a:ext cx="1783080" cy="237744"/>
           </a:xfrm>
           <a:prstGeom prst="rect">
             <a:avLst/>
@@ -40664,7 +40664,7 @@
                 <a:ea typeface="Poppins" pitchFamily="34" charset="-122"/>
                 <a:cs typeface="Poppins" pitchFamily="34" charset="-120"/>
               </a:rPr>
-              <a:t>Isaac Mercado</a:t>
+              <a:t>Karim AlRifaii</a:t>
             </a:r>
             <a:endParaRPr lang="en-US" sz="800" dirty="0"/>
           </a:p>
@@ -40678,7 +40678,7 @@
         </p:nvSpPr>
         <p:spPr>
           <a:xfrm>
-            <a:off x="2468880" y="3702863"/>
+            <a:off x="2468880" y="3856482"/>
             <a:ext cx="2377440" cy="59436"/>
           </a:xfrm>
           <a:prstGeom prst="roundRect">
@@ -40700,8 +40700,8 @@
         </p:nvSpPr>
         <p:spPr>
           <a:xfrm>
-            <a:off x="5029200" y="3635654"/>
-            <a:ext cx="822960" cy="193853"/>
+            <a:off x="5029200" y="3767328"/>
+            <a:ext cx="822960" cy="237744"/>
           </a:xfrm>
           <a:prstGeom prst="rect">
             <a:avLst/>
@@ -40739,8 +40739,8 @@
         </p:nvSpPr>
         <p:spPr>
           <a:xfrm>
-            <a:off x="5943600" y="3635654"/>
-            <a:ext cx="822960" cy="193853"/>
+            <a:off x="5943600" y="3767328"/>
+            <a:ext cx="822960" cy="237744"/>
           </a:xfrm>
           <a:prstGeom prst="rect">
             <a:avLst/>
@@ -40778,8 +40778,8 @@
         </p:nvSpPr>
         <p:spPr>
           <a:xfrm>
-            <a:off x="640080" y="3829507"/>
-            <a:ext cx="1783080" cy="193853"/>
+            <a:off x="640080" y="4005072"/>
+            <a:ext cx="1783080" cy="237744"/>
           </a:xfrm>
           <a:prstGeom prst="rect">
             <a:avLst/>
@@ -40803,7 +40803,7 @@
                 <a:ea typeface="Poppins" pitchFamily="34" charset="-122"/>
                 <a:cs typeface="Poppins" pitchFamily="34" charset="-120"/>
               </a:rPr>
-              <a:t>Rodney Nolan</a:t>
+              <a:t>Ryan Neil Orande</a:t>
             </a:r>
             <a:endParaRPr lang="en-US" sz="800" dirty="0"/>
           </a:p>
@@ -40817,7 +40817,7 @@
         </p:nvSpPr>
         <p:spPr>
           <a:xfrm>
-            <a:off x="2468880" y="3896716"/>
+            <a:off x="2468880" y="4094226"/>
             <a:ext cx="2377440" cy="59436"/>
           </a:xfrm>
           <a:prstGeom prst="roundRect">
@@ -40839,8 +40839,8 @@
         </p:nvSpPr>
         <p:spPr>
           <a:xfrm>
-            <a:off x="5029200" y="3829507"/>
-            <a:ext cx="822960" cy="193853"/>
+            <a:off x="5029200" y="4005072"/>
+            <a:ext cx="822960" cy="237744"/>
           </a:xfrm>
           <a:prstGeom prst="rect">
             <a:avLst/>
@@ -40878,8 +40878,8 @@
         </p:nvSpPr>
         <p:spPr>
           <a:xfrm>
-            <a:off x="5943600" y="3829507"/>
-            <a:ext cx="822960" cy="193853"/>
+            <a:off x="5943600" y="4005072"/>
+            <a:ext cx="822960" cy="237744"/>
           </a:xfrm>
           <a:prstGeom prst="rect">
             <a:avLst/>
@@ -40917,8 +40917,8 @@
         </p:nvSpPr>
         <p:spPr>
           <a:xfrm>
-            <a:off x="640080" y="4023360"/>
-            <a:ext cx="1783080" cy="193853"/>
+            <a:off x="640080" y="4242816"/>
+            <a:ext cx="1783080" cy="237744"/>
           </a:xfrm>
           <a:prstGeom prst="rect">
             <a:avLst/>
@@ -40942,7 +40942,7 @@
                 <a:ea typeface="Poppins" pitchFamily="34" charset="-122"/>
                 <a:cs typeface="Poppins" pitchFamily="34" charset="-120"/>
               </a:rPr>
-              <a:t>Karim AlRifaii</a:t>
+              <a:t>Isayah Kuhlmann</a:t>
             </a:r>
             <a:endParaRPr lang="en-US" sz="800" dirty="0"/>
           </a:p>
@@ -40956,7 +40956,7 @@
         </p:nvSpPr>
         <p:spPr>
           <a:xfrm>
-            <a:off x="2468880" y="4090568"/>
+            <a:off x="2468880" y="4331970"/>
             <a:ext cx="2377440" cy="59436"/>
           </a:xfrm>
           <a:prstGeom prst="roundRect">
@@ -40978,8 +40978,8 @@
         </p:nvSpPr>
         <p:spPr>
           <a:xfrm>
-            <a:off x="5029200" y="4023360"/>
-            <a:ext cx="822960" cy="193853"/>
+            <a:off x="5029200" y="4242816"/>
+            <a:ext cx="822960" cy="237744"/>
           </a:xfrm>
           <a:prstGeom prst="rect">
             <a:avLst/>
@@ -41017,8 +41017,8 @@
         </p:nvSpPr>
         <p:spPr>
           <a:xfrm>
-            <a:off x="5943600" y="4023360"/>
-            <a:ext cx="822960" cy="193853"/>
+            <a:off x="5943600" y="4242816"/>
+            <a:ext cx="822960" cy="237744"/>
           </a:xfrm>
           <a:prstGeom prst="rect">
             <a:avLst/>
@@ -41056,8 +41056,8 @@
         </p:nvSpPr>
         <p:spPr>
           <a:xfrm>
-            <a:off x="640080" y="4217213"/>
-            <a:ext cx="1783080" cy="193853"/>
+            <a:off x="640080" y="4480560"/>
+            <a:ext cx="1783080" cy="237744"/>
           </a:xfrm>
           <a:prstGeom prst="rect">
             <a:avLst/>
@@ -41081,7 +41081,7 @@
                 <a:ea typeface="Poppins" pitchFamily="34" charset="-122"/>
                 <a:cs typeface="Poppins" pitchFamily="34" charset="-120"/>
               </a:rPr>
-              <a:t>Ryan Neil Orande</a:t>
+              <a:t>Argenis Rafael Guevara</a:t>
             </a:r>
             <a:endParaRPr lang="en-US" sz="800" dirty="0"/>
           </a:p>
@@ -41095,7 +41095,7 @@
         </p:nvSpPr>
         <p:spPr>
           <a:xfrm>
-            <a:off x="2468880" y="4284421"/>
+            <a:off x="2468880" y="4569714"/>
             <a:ext cx="2377440" cy="59436"/>
           </a:xfrm>
           <a:prstGeom prst="roundRect">
@@ -41117,8 +41117,8 @@
         </p:nvSpPr>
         <p:spPr>
           <a:xfrm>
-            <a:off x="5029200" y="4217213"/>
-            <a:ext cx="822960" cy="193853"/>
+            <a:off x="5029200" y="4480560"/>
+            <a:ext cx="822960" cy="237744"/>
           </a:xfrm>
           <a:prstGeom prst="rect">
             <a:avLst/>
@@ -41156,8 +41156,8 @@
         </p:nvSpPr>
         <p:spPr>
           <a:xfrm>
-            <a:off x="5943600" y="4217213"/>
-            <a:ext cx="822960" cy="193853"/>
+            <a:off x="5943600" y="4480560"/>
+            <a:ext cx="822960" cy="237744"/>
           </a:xfrm>
           <a:prstGeom prst="rect">
             <a:avLst/>
@@ -41189,14 +41189,34 @@
       </p:sp>
       <p:sp>
         <p:nvSpPr>
-          <p:cNvPr id="73" name="Text 71"/>
-          <p:cNvSpPr txBox="1"/>
-          <p:nvPr/>
-        </p:nvSpPr>
-        <p:spPr>
-          <a:xfrm>
-            <a:off x="640080" y="4411066"/>
-            <a:ext cx="1783080" cy="193853"/>
+          <p:cNvPr id="73" name="Shape 71"/>
+          <p:cNvSpPr/>
+          <p:nvPr/>
+        </p:nvSpPr>
+        <p:spPr>
+          <a:xfrm>
+            <a:off x="640080" y="4736592"/>
+            <a:ext cx="6126480" cy="10973"/>
+          </a:xfrm>
+          <a:prstGeom prst="rect">
+            <a:avLst/>
+          </a:prstGeom>
+          <a:solidFill>
+            <a:srgbClr val="12293A"/>
+          </a:solidFill>
+          <a:ln/>
+        </p:spPr>
+      </p:sp>
+      <p:sp>
+        <p:nvSpPr>
+          <p:cNvPr id="74" name="Text 72"/>
+          <p:cNvSpPr txBox="1"/>
+          <p:nvPr/>
+        </p:nvSpPr>
+        <p:spPr>
+          <a:xfrm>
+            <a:off x="640080" y="4764024"/>
+            <a:ext cx="1783080" cy="237744"/>
           </a:xfrm>
           <a:prstGeom prst="rect">
             <a:avLst/>
@@ -41212,7 +41232,46 @@
               <a:buNone/>
             </a:pPr>
             <a:r>
-              <a:rPr lang="en-US" sz="800" dirty="0">
+              <a:rPr lang="en-US" sz="850" b="1" dirty="0">
+                <a:solidFill>
+                  <a:srgbClr val="12293A"/>
+                </a:solidFill>
+                <a:latin typeface="Poppins" pitchFamily="34" charset="0"/>
+                <a:ea typeface="Poppins" pitchFamily="34" charset="-122"/>
+                <a:cs typeface="Poppins" pitchFamily="34" charset="-120"/>
+              </a:rPr>
+              <a:t>TOTAL</a:t>
+            </a:r>
+            <a:endParaRPr lang="en-US" sz="850" dirty="0"/>
+          </a:p>
+        </p:txBody>
+      </p:sp>
+      <p:sp>
+        <p:nvSpPr>
+          <p:cNvPr id="75" name="Text 73"/>
+          <p:cNvSpPr txBox="1"/>
+          <p:nvPr/>
+        </p:nvSpPr>
+        <p:spPr>
+          <a:xfrm>
+            <a:off x="2468880" y="4764024"/>
+            <a:ext cx="2377440" cy="237744"/>
+          </a:xfrm>
+          <a:prstGeom prst="rect">
+            <a:avLst/>
+          </a:prstGeom>
+          <a:noFill/>
+          <a:ln/>
+        </p:spPr>
+        <p:txBody>
+          <a:bodyPr wrap="square" lIns="0" tIns="0" rIns="0" bIns="0" rtlCol="0" anchor="ctr"/>
+          <a:lstStyle/>
+          <a:p>
+            <a:pPr indent="0" marL="0">
+              <a:buNone/>
+            </a:pPr>
+            <a:r>
+              <a:rPr lang="en-US" sz="700" dirty="0">
                 <a:solidFill>
                   <a:srgbClr val="5E7280"/>
                 </a:solidFill>
@@ -41220,44 +41279,22 @@
                 <a:ea typeface="Poppins" pitchFamily="34" charset="-122"/>
                 <a:cs typeface="Poppins" pitchFamily="34" charset="-120"/>
               </a:rPr>
-              <a:t>Isayah Kuhlmann</a:t>
-            </a:r>
-            <a:endParaRPr lang="en-US" sz="800" dirty="0"/>
-          </a:p>
-        </p:txBody>
-      </p:sp>
-      <p:sp>
-        <p:nvSpPr>
-          <p:cNvPr id="74" name="Shape 72"/>
-          <p:cNvSpPr/>
-          <p:nvPr/>
-        </p:nvSpPr>
-        <p:spPr>
-          <a:xfrm>
-            <a:off x="2468880" y="4478274"/>
-            <a:ext cx="2377440" cy="59436"/>
-          </a:xfrm>
-          <a:prstGeom prst="roundRect">
-            <a:avLst>
-              <a:gd name="adj" fmla="val 49231"/>
-            </a:avLst>
-          </a:prstGeom>
-          <a:solidFill>
-            <a:srgbClr val="E2EAEE"/>
-          </a:solidFill>
-          <a:ln/>
-        </p:spPr>
-      </p:sp>
-      <p:sp>
-        <p:nvSpPr>
-          <p:cNvPr id="75" name="Text 73"/>
-          <p:cNvSpPr txBox="1"/>
-          <p:nvPr/>
-        </p:nvSpPr>
-        <p:spPr>
-          <a:xfrm>
-            <a:off x="5029200" y="4411066"/>
-            <a:ext cx="822960" cy="193853"/>
+              <a:t>7 PS people × 38h = 266h available</a:t>
+            </a:r>
+            <a:endParaRPr lang="en-US" sz="700" dirty="0"/>
+          </a:p>
+        </p:txBody>
+      </p:sp>
+      <p:sp>
+        <p:nvSpPr>
+          <p:cNvPr id="76" name="Text 74"/>
+          <p:cNvSpPr txBox="1"/>
+          <p:nvPr/>
+        </p:nvSpPr>
+        <p:spPr>
+          <a:xfrm>
+            <a:off x="5029200" y="4764024"/>
+            <a:ext cx="822960" cy="237744"/>
           </a:xfrm>
           <a:prstGeom prst="rect">
             <a:avLst/>
@@ -41273,30 +41310,30 @@
               <a:buNone/>
             </a:pPr>
             <a:r>
-              <a:rPr lang="en-US" sz="800" dirty="0">
-                <a:solidFill>
-                  <a:srgbClr val="8FA1AC"/>
-                </a:solidFill>
-                <a:latin typeface="Poppins" pitchFamily="34" charset="0"/>
-                <a:ea typeface="Poppins" pitchFamily="34" charset="-122"/>
-                <a:cs typeface="Poppins" pitchFamily="34" charset="-120"/>
-              </a:rPr>
-              <a:t>—</a:t>
-            </a:r>
-            <a:endParaRPr lang="en-US" sz="800" dirty="0"/>
-          </a:p>
-        </p:txBody>
-      </p:sp>
-      <p:sp>
-        <p:nvSpPr>
-          <p:cNvPr id="76" name="Text 74"/>
-          <p:cNvSpPr txBox="1"/>
-          <p:nvPr/>
-        </p:nvSpPr>
-        <p:spPr>
-          <a:xfrm>
-            <a:off x="5943600" y="4411066"/>
-            <a:ext cx="822960" cy="193853"/>
+              <a:rPr lang="en-US" sz="950" b="1" dirty="0">
+                <a:solidFill>
+                  <a:srgbClr val="2C8394"/>
+                </a:solidFill>
+                <a:latin typeface="Poppins" pitchFamily="34" charset="0"/>
+                <a:ea typeface="Poppins" pitchFamily="34" charset="-122"/>
+                <a:cs typeface="Poppins" pitchFamily="34" charset="-120"/>
+              </a:rPr>
+              <a:t>88.87h</a:t>
+            </a:r>
+            <a:endParaRPr lang="en-US" sz="950" dirty="0"/>
+          </a:p>
+        </p:txBody>
+      </p:sp>
+      <p:sp>
+        <p:nvSpPr>
+          <p:cNvPr id="77" name="Text 75"/>
+          <p:cNvSpPr txBox="1"/>
+          <p:nvPr/>
+        </p:nvSpPr>
+        <p:spPr>
+          <a:xfrm>
+            <a:off x="5943600" y="4764024"/>
+            <a:ext cx="822960" cy="237744"/>
           </a:xfrm>
           <a:prstGeom prst="rect">
             <a:avLst/>
@@ -41312,291 +41349,15 @@
               <a:buNone/>
             </a:pPr>
             <a:r>
-              <a:rPr lang="en-US" sz="600" dirty="0">
-                <a:solidFill>
-                  <a:srgbClr val="8FA1AC"/>
-                </a:solidFill>
-                <a:latin typeface="Poppins" pitchFamily="34" charset="0"/>
-                <a:ea typeface="Poppins" pitchFamily="34" charset="-122"/>
-                <a:cs typeface="Poppins" pitchFamily="34" charset="-120"/>
-              </a:rPr>
-              <a:t>no time logged</a:t>
-            </a:r>
-            <a:endParaRPr lang="en-US" sz="600" dirty="0"/>
-          </a:p>
-        </p:txBody>
-      </p:sp>
-      <p:sp>
-        <p:nvSpPr>
-          <p:cNvPr id="77" name="Text 75"/>
-          <p:cNvSpPr txBox="1"/>
-          <p:nvPr/>
-        </p:nvSpPr>
-        <p:spPr>
-          <a:xfrm>
-            <a:off x="640080" y="4604918"/>
-            <a:ext cx="1783080" cy="193853"/>
-          </a:xfrm>
-          <a:prstGeom prst="rect">
-            <a:avLst/>
-          </a:prstGeom>
-          <a:noFill/>
-          <a:ln/>
-        </p:spPr>
-        <p:txBody>
-          <a:bodyPr wrap="square" lIns="0" tIns="0" rIns="0" bIns="0" rtlCol="0" anchor="ctr"/>
-          <a:lstStyle/>
-          <a:p>
-            <a:pPr indent="0" marL="0">
-              <a:buNone/>
-            </a:pPr>
-            <a:r>
-              <a:rPr lang="en-US" sz="800" dirty="0">
-                <a:solidFill>
-                  <a:srgbClr val="5E7280"/>
-                </a:solidFill>
-                <a:latin typeface="Poppins" pitchFamily="34" charset="0"/>
-                <a:ea typeface="Poppins" pitchFamily="34" charset="-122"/>
-                <a:cs typeface="Poppins" pitchFamily="34" charset="-120"/>
-              </a:rPr>
-              <a:t>Argenis Rafael Guevara</a:t>
-            </a:r>
-            <a:endParaRPr lang="en-US" sz="800" dirty="0"/>
-          </a:p>
-        </p:txBody>
-      </p:sp>
-      <p:sp>
-        <p:nvSpPr>
-          <p:cNvPr id="78" name="Shape 76"/>
-          <p:cNvSpPr/>
-          <p:nvPr/>
-        </p:nvSpPr>
-        <p:spPr>
-          <a:xfrm>
-            <a:off x="2468880" y="4672127"/>
-            <a:ext cx="2377440" cy="59436"/>
-          </a:xfrm>
-          <a:prstGeom prst="roundRect">
-            <a:avLst>
-              <a:gd name="adj" fmla="val 49231"/>
-            </a:avLst>
-          </a:prstGeom>
-          <a:solidFill>
-            <a:srgbClr val="E2EAEE"/>
-          </a:solidFill>
-          <a:ln/>
-        </p:spPr>
-      </p:sp>
-      <p:sp>
-        <p:nvSpPr>
-          <p:cNvPr id="79" name="Text 77"/>
-          <p:cNvSpPr txBox="1"/>
-          <p:nvPr/>
-        </p:nvSpPr>
-        <p:spPr>
-          <a:xfrm>
-            <a:off x="5029200" y="4604918"/>
-            <a:ext cx="822960" cy="193853"/>
-          </a:xfrm>
-          <a:prstGeom prst="rect">
-            <a:avLst/>
-          </a:prstGeom>
-          <a:noFill/>
-          <a:ln/>
-        </p:spPr>
-        <p:txBody>
-          <a:bodyPr wrap="square" lIns="0" tIns="0" rIns="0" bIns="0" rtlCol="0" anchor="ctr"/>
-          <a:lstStyle/>
-          <a:p>
-            <a:pPr algn="r" indent="0" marL="0">
-              <a:buNone/>
-            </a:pPr>
-            <a:r>
-              <a:rPr lang="en-US" sz="800" dirty="0">
-                <a:solidFill>
-                  <a:srgbClr val="8FA1AC"/>
-                </a:solidFill>
-                <a:latin typeface="Poppins" pitchFamily="34" charset="0"/>
-                <a:ea typeface="Poppins" pitchFamily="34" charset="-122"/>
-                <a:cs typeface="Poppins" pitchFamily="34" charset="-120"/>
-              </a:rPr>
-              <a:t>—</a:t>
-            </a:r>
-            <a:endParaRPr lang="en-US" sz="800" dirty="0"/>
-          </a:p>
-        </p:txBody>
-      </p:sp>
-      <p:sp>
-        <p:nvSpPr>
-          <p:cNvPr id="80" name="Text 78"/>
-          <p:cNvSpPr txBox="1"/>
-          <p:nvPr/>
-        </p:nvSpPr>
-        <p:spPr>
-          <a:xfrm>
-            <a:off x="5943600" y="4604918"/>
-            <a:ext cx="822960" cy="193853"/>
-          </a:xfrm>
-          <a:prstGeom prst="rect">
-            <a:avLst/>
-          </a:prstGeom>
-          <a:noFill/>
-          <a:ln/>
-        </p:spPr>
-        <p:txBody>
-          <a:bodyPr wrap="square" lIns="0" tIns="0" rIns="0" bIns="0" rtlCol="0" anchor="ctr"/>
-          <a:lstStyle/>
-          <a:p>
-            <a:pPr algn="r" indent="0" marL="0">
-              <a:buNone/>
-            </a:pPr>
-            <a:r>
-              <a:rPr lang="en-US" sz="600" dirty="0">
-                <a:solidFill>
-                  <a:srgbClr val="8FA1AC"/>
-                </a:solidFill>
-                <a:latin typeface="Poppins" pitchFamily="34" charset="0"/>
-                <a:ea typeface="Poppins" pitchFamily="34" charset="-122"/>
-                <a:cs typeface="Poppins" pitchFamily="34" charset="-120"/>
-              </a:rPr>
-              <a:t>no time logged</a:t>
-            </a:r>
-            <a:endParaRPr lang="en-US" sz="600" dirty="0"/>
-          </a:p>
-        </p:txBody>
-      </p:sp>
-      <p:sp>
-        <p:nvSpPr>
-          <p:cNvPr id="81" name="Shape 79"/>
-          <p:cNvSpPr/>
-          <p:nvPr/>
-        </p:nvSpPr>
-        <p:spPr>
-          <a:xfrm>
-            <a:off x="640080" y="4817059"/>
-            <a:ext cx="6126480" cy="10973"/>
-          </a:xfrm>
-          <a:prstGeom prst="rect">
-            <a:avLst/>
-          </a:prstGeom>
-          <a:solidFill>
-            <a:srgbClr val="12293A"/>
-          </a:solidFill>
-          <a:ln/>
-        </p:spPr>
-      </p:sp>
-      <p:sp>
-        <p:nvSpPr>
-          <p:cNvPr id="82" name="Text 80"/>
-          <p:cNvSpPr txBox="1"/>
-          <p:nvPr/>
-        </p:nvSpPr>
-        <p:spPr>
-          <a:xfrm>
-            <a:off x="640080" y="4844491"/>
-            <a:ext cx="1783080" cy="193853"/>
-          </a:xfrm>
-          <a:prstGeom prst="rect">
-            <a:avLst/>
-          </a:prstGeom>
-          <a:noFill/>
-          <a:ln/>
-        </p:spPr>
-        <p:txBody>
-          <a:bodyPr wrap="square" lIns="0" tIns="0" rIns="0" bIns="0" rtlCol="0" anchor="ctr"/>
-          <a:lstStyle/>
-          <a:p>
-            <a:pPr indent="0" marL="0">
-              <a:buNone/>
-            </a:pPr>
-            <a:r>
-              <a:rPr lang="en-US" sz="850" b="1" dirty="0">
-                <a:solidFill>
-                  <a:srgbClr val="12293A"/>
-                </a:solidFill>
-                <a:latin typeface="Poppins" pitchFamily="34" charset="0"/>
-                <a:ea typeface="Poppins" pitchFamily="34" charset="-122"/>
-                <a:cs typeface="Poppins" pitchFamily="34" charset="-120"/>
-              </a:rPr>
-              <a:t>TOTAL</a:t>
-            </a:r>
-            <a:endParaRPr lang="en-US" sz="850" dirty="0"/>
-          </a:p>
-        </p:txBody>
-      </p:sp>
-      <p:sp>
-        <p:nvSpPr>
-          <p:cNvPr id="83" name="Text 81"/>
-          <p:cNvSpPr txBox="1"/>
-          <p:nvPr/>
-        </p:nvSpPr>
-        <p:spPr>
-          <a:xfrm>
-            <a:off x="2468880" y="4844491"/>
-            <a:ext cx="2377440" cy="193853"/>
-          </a:xfrm>
-          <a:prstGeom prst="rect">
-            <a:avLst/>
-          </a:prstGeom>
-          <a:noFill/>
-          <a:ln/>
-        </p:spPr>
-        <p:txBody>
-          <a:bodyPr wrap="square" lIns="0" tIns="0" rIns="0" bIns="0" rtlCol="0" anchor="ctr"/>
-          <a:lstStyle/>
-          <a:p>
-            <a:pPr indent="0" marL="0">
-              <a:buNone/>
-            </a:pPr>
-            <a:r>
-              <a:rPr lang="en-US" sz="700" dirty="0">
-                <a:solidFill>
-                  <a:srgbClr val="5E7280"/>
-                </a:solidFill>
-                <a:latin typeface="Poppins" pitchFamily="34" charset="0"/>
-                <a:ea typeface="Poppins" pitchFamily="34" charset="-122"/>
-                <a:cs typeface="Poppins" pitchFamily="34" charset="-120"/>
-              </a:rPr>
-              <a:t>9 PS people × 38h = 342h available</a:t>
-            </a:r>
-            <a:endParaRPr lang="en-US" sz="700" dirty="0"/>
-          </a:p>
-        </p:txBody>
-      </p:sp>
-      <p:sp>
-        <p:nvSpPr>
-          <p:cNvPr id="84" name="Text 82"/>
-          <p:cNvSpPr txBox="1"/>
-          <p:nvPr/>
-        </p:nvSpPr>
-        <p:spPr>
-          <a:xfrm>
-            <a:off x="5029200" y="4844491"/>
-            <a:ext cx="822960" cy="193853"/>
-          </a:xfrm>
-          <a:prstGeom prst="rect">
-            <a:avLst/>
-          </a:prstGeom>
-          <a:noFill/>
-          <a:ln/>
-        </p:spPr>
-        <p:txBody>
-          <a:bodyPr wrap="square" lIns="0" tIns="0" rIns="0" bIns="0" rtlCol="0" anchor="ctr"/>
-          <a:lstStyle/>
-          <a:p>
-            <a:pPr algn="r" indent="0" marL="0">
-              <a:buNone/>
-            </a:pPr>
-            <a:r>
               <a:rPr lang="en-US" sz="950" b="1" dirty="0">
                 <a:solidFill>
-                  <a:srgbClr val="2C8394"/>
-                </a:solidFill>
-                <a:latin typeface="Poppins" pitchFamily="34" charset="0"/>
-                <a:ea typeface="Poppins" pitchFamily="34" charset="-122"/>
-                <a:cs typeface="Poppins" pitchFamily="34" charset="-120"/>
-              </a:rPr>
-              <a:t>88.87h</a:t>
+                  <a:srgbClr val="C88A2E"/>
+                </a:solidFill>
+                <a:latin typeface="Poppins" pitchFamily="34" charset="0"/>
+                <a:ea typeface="Poppins" pitchFamily="34" charset="-122"/>
+                <a:cs typeface="Poppins" pitchFamily="34" charset="-120"/>
+              </a:rPr>
+              <a:t>33.4%</a:t>
             </a:r>
             <a:endParaRPr lang="en-US" sz="950" dirty="0"/>
           </a:p>
@@ -41604,46 +41365,7 @@
       </p:sp>
       <p:sp>
         <p:nvSpPr>
-          <p:cNvPr id="85" name="Text 83"/>
-          <p:cNvSpPr txBox="1"/>
-          <p:nvPr/>
-        </p:nvSpPr>
-        <p:spPr>
-          <a:xfrm>
-            <a:off x="5943600" y="4844491"/>
-            <a:ext cx="822960" cy="193853"/>
-          </a:xfrm>
-          <a:prstGeom prst="rect">
-            <a:avLst/>
-          </a:prstGeom>
-          <a:noFill/>
-          <a:ln/>
-        </p:spPr>
-        <p:txBody>
-          <a:bodyPr wrap="square" lIns="0" tIns="0" rIns="0" bIns="0" rtlCol="0" anchor="ctr"/>
-          <a:lstStyle/>
-          <a:p>
-            <a:pPr algn="r" indent="0" marL="0">
-              <a:buNone/>
-            </a:pPr>
-            <a:r>
-              <a:rPr lang="en-US" sz="950" b="1" dirty="0">
-                <a:solidFill>
-                  <a:srgbClr val="C88A2E"/>
-                </a:solidFill>
-                <a:latin typeface="Poppins" pitchFamily="34" charset="0"/>
-                <a:ea typeface="Poppins" pitchFamily="34" charset="-122"/>
-                <a:cs typeface="Poppins" pitchFamily="34" charset="-120"/>
-              </a:rPr>
-              <a:t>26.0%</a:t>
-            </a:r>
-            <a:endParaRPr lang="en-US" sz="950" dirty="0"/>
-          </a:p>
-        </p:txBody>
-      </p:sp>
-      <p:sp>
-        <p:nvSpPr>
-          <p:cNvPr id="86" name="Text 84"/>
+          <p:cNvPr id="78" name="Text 76"/>
           <p:cNvSpPr txBox="1"/>
           <p:nvPr/>
         </p:nvSpPr>
@@ -41674,7 +41396,7 @@
                 <a:ea typeface="Poppins" pitchFamily="34" charset="-122"/>
                 <a:cs typeface="Poppins" pitchFamily="34" charset="-120"/>
               </a:rPr>
-              <a:t>Available staff = the 9 PS people on PS-pipeline tickets open now or closed this week, at 38h each. Lopez, Hikuroa, Magabo, Ho, Fenwick and Hettiarachchy hold PS tickets but are not PS staff — they and their hours are excluded.</a:t>
+              <a:t>Available staff = the 7 Professional Services people on PS-pipeline tickets open now or closed this week and not on leave, at 38h each. Rhys Woolcock and Rodney Nolan were on leave and are out of the base. Lopez, Hikuroa, Magabo, Ho, Fenwick and Hettiarachchy hold PS tickets but are not PS staff — they and their hours are excluded.</a:t>
             </a:r>
             <a:endParaRPr lang="en-US" sz="580" dirty="0"/>
           </a:p>
@@ -41682,7 +41404,7 @@
       </p:sp>
       <p:sp>
         <p:nvSpPr>
-          <p:cNvPr id="87" name="Shape 85"/>
+          <p:cNvPr id="79" name="Shape 77"/>
           <p:cNvSpPr/>
           <p:nvPr/>
         </p:nvSpPr>
@@ -41711,7 +41433,7 @@
       </p:sp>
       <p:sp>
         <p:nvSpPr>
-          <p:cNvPr id="88" name="Text 86"/>
+          <p:cNvPr id="80" name="Text 78"/>
           <p:cNvSpPr txBox="1"/>
           <p:nvPr/>
         </p:nvSpPr>
@@ -41764,7 +41486,7 @@
       </p:sp>
       <p:sp>
         <p:nvSpPr>
-          <p:cNvPr id="89" name="Text 87"/>
+          <p:cNvPr id="81" name="Text 79"/>
           <p:cNvSpPr txBox="1"/>
           <p:nvPr/>
         </p:nvSpPr>
@@ -41803,7 +41525,7 @@
       </p:sp>
       <p:sp>
         <p:nvSpPr>
-          <p:cNvPr id="90" name="Text 88"/>
+          <p:cNvPr id="82" name="Text 80"/>
           <p:cNvSpPr txBox="1"/>
           <p:nvPr/>
         </p:nvSpPr>
@@ -41842,7 +41564,7 @@
       </p:sp>
       <p:sp>
         <p:nvSpPr>
-          <p:cNvPr id="91" name="Text 89"/>
+          <p:cNvPr id="83" name="Text 81"/>
           <p:cNvSpPr txBox="1"/>
           <p:nvPr/>
         </p:nvSpPr>
@@ -41881,7 +41603,7 @@
       </p:sp>
       <p:sp>
         <p:nvSpPr>
-          <p:cNvPr id="92" name="Text 90"/>
+          <p:cNvPr id="84" name="Text 82"/>
           <p:cNvSpPr txBox="1"/>
           <p:nvPr/>
         </p:nvSpPr>
@@ -41920,7 +41642,7 @@
       </p:sp>
       <p:sp>
         <p:nvSpPr>
-          <p:cNvPr id="93" name="Shape 91"/>
+          <p:cNvPr id="85" name="Shape 83"/>
           <p:cNvSpPr/>
           <p:nvPr/>
         </p:nvSpPr>
@@ -41942,7 +41664,7 @@
       </p:sp>
       <p:sp>
         <p:nvSpPr>
-          <p:cNvPr id="94" name="Shape 92"/>
+          <p:cNvPr id="86" name="Shape 84"/>
           <p:cNvSpPr/>
           <p:nvPr/>
         </p:nvSpPr>
@@ -41964,7 +41686,7 @@
       </p:sp>
       <p:sp>
         <p:nvSpPr>
-          <p:cNvPr id="95" name="Text 93"/>
+          <p:cNvPr id="87" name="Text 85"/>
           <p:cNvSpPr txBox="1"/>
           <p:nvPr/>
         </p:nvSpPr>
@@ -42003,7 +41725,7 @@
       </p:sp>
       <p:sp>
         <p:nvSpPr>
-          <p:cNvPr id="96" name="Text 94"/>
+          <p:cNvPr id="88" name="Text 86"/>
           <p:cNvSpPr txBox="1"/>
           <p:nvPr/>
         </p:nvSpPr>
@@ -42042,7 +41764,7 @@
       </p:sp>
       <p:sp>
         <p:nvSpPr>
-          <p:cNvPr id="97" name="Text 95"/>
+          <p:cNvPr id="89" name="Text 87"/>
           <p:cNvSpPr txBox="1"/>
           <p:nvPr/>
         </p:nvSpPr>
@@ -42081,7 +41803,7 @@
       </p:sp>
       <p:sp>
         <p:nvSpPr>
-          <p:cNvPr id="98" name="Shape 96"/>
+          <p:cNvPr id="90" name="Shape 88"/>
           <p:cNvSpPr/>
           <p:nvPr/>
         </p:nvSpPr>
@@ -42103,7 +41825,7 @@
       </p:sp>
       <p:sp>
         <p:nvSpPr>
-          <p:cNvPr id="99" name="Shape 97"/>
+          <p:cNvPr id="91" name="Shape 89"/>
           <p:cNvSpPr/>
           <p:nvPr/>
         </p:nvSpPr>
@@ -42125,7 +41847,7 @@
       </p:sp>
       <p:sp>
         <p:nvSpPr>
-          <p:cNvPr id="100" name="Text 98"/>
+          <p:cNvPr id="92" name="Text 90"/>
           <p:cNvSpPr txBox="1"/>
           <p:nvPr/>
         </p:nvSpPr>
@@ -42164,7 +41886,7 @@
       </p:sp>
       <p:sp>
         <p:nvSpPr>
-          <p:cNvPr id="101" name="Text 99"/>
+          <p:cNvPr id="93" name="Text 91"/>
           <p:cNvSpPr txBox="1"/>
           <p:nvPr/>
         </p:nvSpPr>
@@ -42203,7 +41925,7 @@
       </p:sp>
       <p:sp>
         <p:nvSpPr>
-          <p:cNvPr id="102" name="Text 100"/>
+          <p:cNvPr id="94" name="Text 92"/>
           <p:cNvSpPr txBox="1"/>
           <p:nvPr/>
         </p:nvSpPr>
@@ -42242,7 +41964,7 @@
       </p:sp>
       <p:sp>
         <p:nvSpPr>
-          <p:cNvPr id="103" name="Shape 101"/>
+          <p:cNvPr id="95" name="Shape 93"/>
           <p:cNvSpPr/>
           <p:nvPr/>
         </p:nvSpPr>
@@ -42264,7 +41986,7 @@
       </p:sp>
       <p:sp>
         <p:nvSpPr>
-          <p:cNvPr id="104" name="Shape 102"/>
+          <p:cNvPr id="96" name="Shape 94"/>
           <p:cNvSpPr/>
           <p:nvPr/>
         </p:nvSpPr>
@@ -42286,7 +42008,7 @@
       </p:sp>
       <p:sp>
         <p:nvSpPr>
-          <p:cNvPr id="105" name="Text 103"/>
+          <p:cNvPr id="97" name="Text 95"/>
           <p:cNvSpPr txBox="1"/>
           <p:nvPr/>
         </p:nvSpPr>
@@ -42325,7 +42047,7 @@
       </p:sp>
       <p:sp>
         <p:nvSpPr>
-          <p:cNvPr id="106" name="Text 104"/>
+          <p:cNvPr id="98" name="Text 96"/>
           <p:cNvSpPr txBox="1"/>
           <p:nvPr/>
         </p:nvSpPr>
@@ -42364,7 +42086,7 @@
       </p:sp>
       <p:sp>
         <p:nvSpPr>
-          <p:cNvPr id="107" name="Text 105"/>
+          <p:cNvPr id="99" name="Text 97"/>
           <p:cNvSpPr txBox="1"/>
           <p:nvPr/>
         </p:nvSpPr>
@@ -42403,7 +42125,7 @@
       </p:sp>
       <p:sp>
         <p:nvSpPr>
-          <p:cNvPr id="108" name="Shape 106"/>
+          <p:cNvPr id="100" name="Shape 98"/>
           <p:cNvSpPr/>
           <p:nvPr/>
         </p:nvSpPr>
@@ -42425,7 +42147,7 @@
       </p:sp>
       <p:sp>
         <p:nvSpPr>
-          <p:cNvPr id="109" name="Shape 107"/>
+          <p:cNvPr id="101" name="Shape 99"/>
           <p:cNvSpPr/>
           <p:nvPr/>
         </p:nvSpPr>
@@ -42447,7 +42169,7 @@
       </p:sp>
       <p:sp>
         <p:nvSpPr>
-          <p:cNvPr id="110" name="Text 108"/>
+          <p:cNvPr id="102" name="Text 100"/>
           <p:cNvSpPr txBox="1"/>
           <p:nvPr/>
         </p:nvSpPr>
@@ -42486,7 +42208,7 @@
       </p:sp>
       <p:sp>
         <p:nvSpPr>
-          <p:cNvPr id="111" name="Text 109"/>
+          <p:cNvPr id="103" name="Text 101"/>
           <p:cNvSpPr txBox="1"/>
           <p:nvPr/>
         </p:nvSpPr>
@@ -42525,7 +42247,7 @@
       </p:sp>
       <p:sp>
         <p:nvSpPr>
-          <p:cNvPr id="112" name="Text 110"/>
+          <p:cNvPr id="104" name="Text 102"/>
           <p:cNvSpPr txBox="1"/>
           <p:nvPr/>
         </p:nvSpPr>
@@ -42564,7 +42286,7 @@
       </p:sp>
       <p:sp>
         <p:nvSpPr>
-          <p:cNvPr id="113" name="Shape 111"/>
+          <p:cNvPr id="105" name="Shape 103"/>
           <p:cNvSpPr/>
           <p:nvPr/>
         </p:nvSpPr>
@@ -42586,7 +42308,7 @@
       </p:sp>
       <p:sp>
         <p:nvSpPr>
-          <p:cNvPr id="114" name="Shape 112"/>
+          <p:cNvPr id="106" name="Shape 104"/>
           <p:cNvSpPr/>
           <p:nvPr/>
         </p:nvSpPr>
@@ -42608,7 +42330,7 @@
       </p:sp>
       <p:sp>
         <p:nvSpPr>
-          <p:cNvPr id="115" name="Text 113"/>
+          <p:cNvPr id="107" name="Text 105"/>
           <p:cNvSpPr txBox="1"/>
           <p:nvPr/>
         </p:nvSpPr>
@@ -42647,7 +42369,7 @@
       </p:sp>
       <p:sp>
         <p:nvSpPr>
-          <p:cNvPr id="116" name="Text 114"/>
+          <p:cNvPr id="108" name="Text 106"/>
           <p:cNvSpPr txBox="1"/>
           <p:nvPr/>
         </p:nvSpPr>
@@ -42686,7 +42408,7 @@
       </p:sp>
       <p:sp>
         <p:nvSpPr>
-          <p:cNvPr id="117" name="Text 115"/>
+          <p:cNvPr id="109" name="Text 107"/>
           <p:cNvSpPr txBox="1"/>
           <p:nvPr/>
         </p:nvSpPr>
@@ -42725,7 +42447,7 @@
       </p:sp>
       <p:sp>
         <p:nvSpPr>
-          <p:cNvPr id="118" name="Shape 116"/>
+          <p:cNvPr id="110" name="Shape 108"/>
           <p:cNvSpPr/>
           <p:nvPr/>
         </p:nvSpPr>
@@ -42747,7 +42469,7 @@
       </p:sp>
       <p:sp>
         <p:nvSpPr>
-          <p:cNvPr id="119" name="Text 117"/>
+          <p:cNvPr id="111" name="Text 109"/>
           <p:cNvSpPr txBox="1"/>
           <p:nvPr/>
         </p:nvSpPr>
@@ -42786,7 +42508,7 @@
       </p:sp>
       <p:sp>
         <p:nvSpPr>
-          <p:cNvPr id="120" name="Text 118"/>
+          <p:cNvPr id="112" name="Text 110"/>
           <p:cNvSpPr txBox="1"/>
           <p:nvPr/>
         </p:nvSpPr>
@@ -42825,7 +42547,7 @@
       </p:sp>
       <p:sp>
         <p:nvSpPr>
-          <p:cNvPr id="121" name="Shape 119"/>
+          <p:cNvPr id="113" name="Shape 111"/>
           <p:cNvSpPr/>
           <p:nvPr/>
         </p:nvSpPr>
@@ -42845,7 +42567,7 @@
       </p:sp>
       <p:sp>
         <p:nvSpPr>
-          <p:cNvPr id="122" name="Text 120"/>
+          <p:cNvPr id="114" name="Text 112"/>
           <p:cNvSpPr txBox="1"/>
           <p:nvPr/>
         </p:nvSpPr>
@@ -42884,7 +42606,7 @@
       </p:sp>
       <p:sp>
         <p:nvSpPr>
-          <p:cNvPr id="123" name="Text 121"/>
+          <p:cNvPr id="115" name="Text 113"/>
           <p:cNvSpPr txBox="1"/>
           <p:nvPr/>
         </p:nvSpPr>
@@ -42923,7 +42645,7 @@
       </p:sp>
       <p:sp>
         <p:nvSpPr>
-          <p:cNvPr id="124" name="Text 122"/>
+          <p:cNvPr id="116" name="Text 114"/>
           <p:cNvSpPr txBox="1"/>
           <p:nvPr/>
         </p:nvSpPr>
@@ -42962,7 +42684,7 @@
       </p:sp>
       <p:sp>
         <p:nvSpPr>
-          <p:cNvPr id="125" name="Text 123"/>
+          <p:cNvPr id="117" name="Text 115"/>
           <p:cNvSpPr txBox="1"/>
           <p:nvPr/>
         </p:nvSpPr>
@@ -43001,7 +42723,7 @@
       </p:sp>
       <p:sp>
         <p:nvSpPr>
-          <p:cNvPr id="126" name="Shape 124"/>
+          <p:cNvPr id="118" name="Shape 116"/>
           <p:cNvSpPr/>
           <p:nvPr/>
         </p:nvSpPr>
@@ -43030,7 +42752,7 @@
       </p:sp>
       <p:sp>
         <p:nvSpPr>
-          <p:cNvPr id="127" name="Text 125"/>
+          <p:cNvPr id="119" name="Text 117"/>
           <p:cNvSpPr txBox="1"/>
           <p:nvPr/>
         </p:nvSpPr>
@@ -43083,7 +42805,7 @@
       </p:sp>
       <p:sp>
         <p:nvSpPr>
-          <p:cNvPr id="128" name="Text 126"/>
+          <p:cNvPr id="120" name="Text 118"/>
           <p:cNvSpPr txBox="1"/>
           <p:nvPr/>
         </p:nvSpPr>
@@ -43122,7 +42844,7 @@
       </p:sp>
       <p:sp>
         <p:nvSpPr>
-          <p:cNvPr id="129" name="Text 127"/>
+          <p:cNvPr id="121" name="Text 119"/>
           <p:cNvSpPr txBox="1"/>
           <p:nvPr/>
         </p:nvSpPr>
@@ -43161,7 +42883,7 @@
       </p:sp>
       <p:sp>
         <p:nvSpPr>
-          <p:cNvPr id="130" name="Text 128"/>
+          <p:cNvPr id="122" name="Text 120"/>
           <p:cNvSpPr txBox="1"/>
           <p:nvPr/>
         </p:nvSpPr>
@@ -43200,7 +42922,7 @@
       </p:sp>
       <p:sp>
         <p:nvSpPr>
-          <p:cNvPr id="131" name="Text 129"/>
+          <p:cNvPr id="123" name="Text 121"/>
           <p:cNvSpPr txBox="1"/>
           <p:nvPr/>
         </p:nvSpPr>
@@ -43239,7 +42961,7 @@
       </p:sp>
       <p:sp>
         <p:nvSpPr>
-          <p:cNvPr id="132" name="Text 130"/>
+          <p:cNvPr id="124" name="Text 122"/>
           <p:cNvSpPr txBox="1"/>
           <p:nvPr/>
         </p:nvSpPr>
@@ -43278,7 +43000,7 @@
       </p:sp>
       <p:sp>
         <p:nvSpPr>
-          <p:cNvPr id="133" name="Shape 131"/>
+          <p:cNvPr id="125" name="Shape 123"/>
           <p:cNvSpPr/>
           <p:nvPr/>
         </p:nvSpPr>
@@ -43298,7 +43020,7 @@
       </p:sp>
       <p:sp>
         <p:nvSpPr>
-          <p:cNvPr id="134" name="Text 132"/>
+          <p:cNvPr id="126" name="Text 124"/>
           <p:cNvSpPr txBox="1"/>
           <p:nvPr/>
         </p:nvSpPr>
@@ -43337,7 +43059,7 @@
       </p:sp>
       <p:sp>
         <p:nvSpPr>
-          <p:cNvPr id="135" name="Text 133"/>
+          <p:cNvPr id="127" name="Text 125"/>
           <p:cNvSpPr txBox="1"/>
           <p:nvPr/>
         </p:nvSpPr>
@@ -43376,7 +43098,7 @@
       </p:sp>
       <p:sp>
         <p:nvSpPr>
-          <p:cNvPr id="136" name="Text 134"/>
+          <p:cNvPr id="128" name="Text 126"/>
           <p:cNvSpPr txBox="1"/>
           <p:nvPr/>
         </p:nvSpPr>
@@ -43415,7 +43137,7 @@
       </p:sp>
       <p:sp>
         <p:nvSpPr>
-          <p:cNvPr id="137" name="Text 135"/>
+          <p:cNvPr id="129" name="Text 127"/>
           <p:cNvSpPr txBox="1"/>
           <p:nvPr/>
         </p:nvSpPr>
@@ -43454,7 +43176,7 @@
       </p:sp>
       <p:sp>
         <p:nvSpPr>
-          <p:cNvPr id="138" name="Text 136"/>
+          <p:cNvPr id="130" name="Text 128"/>
           <p:cNvSpPr txBox="1"/>
           <p:nvPr/>
         </p:nvSpPr>
@@ -43493,7 +43215,7 @@
       </p:sp>
       <p:sp>
         <p:nvSpPr>
-          <p:cNvPr id="139" name="Shape 137"/>
+          <p:cNvPr id="131" name="Shape 129"/>
           <p:cNvSpPr/>
           <p:nvPr/>
         </p:nvSpPr>
@@ -43513,7 +43235,7 @@
       </p:sp>
       <p:sp>
         <p:nvSpPr>
-          <p:cNvPr id="140" name="Text 138"/>
+          <p:cNvPr id="132" name="Text 130"/>
           <p:cNvSpPr txBox="1"/>
           <p:nvPr/>
         </p:nvSpPr>
@@ -43552,7 +43274,7 @@
       </p:sp>
       <p:sp>
         <p:nvSpPr>
-          <p:cNvPr id="141" name="Text 139"/>
+          <p:cNvPr id="133" name="Text 131"/>
           <p:cNvSpPr txBox="1"/>
           <p:nvPr/>
         </p:nvSpPr>
@@ -43591,7 +43313,7 @@
       </p:sp>
       <p:sp>
         <p:nvSpPr>
-          <p:cNvPr id="142" name="Text 140"/>
+          <p:cNvPr id="134" name="Text 132"/>
           <p:cNvSpPr txBox="1"/>
           <p:nvPr/>
         </p:nvSpPr>
@@ -43630,7 +43352,7 @@
       </p:sp>
       <p:sp>
         <p:nvSpPr>
-          <p:cNvPr id="143" name="Text 141"/>
+          <p:cNvPr id="135" name="Text 133"/>
           <p:cNvSpPr txBox="1"/>
           <p:nvPr/>
         </p:nvSpPr>
@@ -43669,7 +43391,7 @@
       </p:sp>
       <p:sp>
         <p:nvSpPr>
-          <p:cNvPr id="144" name="Text 142"/>
+          <p:cNvPr id="136" name="Text 134"/>
           <p:cNvSpPr txBox="1"/>
           <p:nvPr/>
         </p:nvSpPr>
@@ -43708,7 +43430,7 @@
       </p:sp>
       <p:sp>
         <p:nvSpPr>
-          <p:cNvPr id="145" name="Shape 143"/>
+          <p:cNvPr id="137" name="Shape 135"/>
           <p:cNvSpPr/>
           <p:nvPr/>
         </p:nvSpPr>
@@ -43728,7 +43450,7 @@
       </p:sp>
       <p:sp>
         <p:nvSpPr>
-          <p:cNvPr id="146" name="Text 144"/>
+          <p:cNvPr id="138" name="Text 136"/>
           <p:cNvSpPr txBox="1"/>
           <p:nvPr/>
         </p:nvSpPr>
@@ -43767,7 +43489,7 @@
       </p:sp>
       <p:sp>
         <p:nvSpPr>
-          <p:cNvPr id="147" name="Text 145"/>
+          <p:cNvPr id="139" name="Text 137"/>
           <p:cNvSpPr txBox="1"/>
           <p:nvPr/>
         </p:nvSpPr>
@@ -43806,7 +43528,7 @@
       </p:sp>
       <p:sp>
         <p:nvSpPr>
-          <p:cNvPr id="148" name="Text 146"/>
+          <p:cNvPr id="140" name="Text 138"/>
           <p:cNvSpPr txBox="1"/>
           <p:nvPr/>
         </p:nvSpPr>
@@ -43845,7 +43567,7 @@
       </p:sp>
       <p:sp>
         <p:nvSpPr>
-          <p:cNvPr id="149" name="Text 147"/>
+          <p:cNvPr id="141" name="Text 139"/>
           <p:cNvSpPr txBox="1"/>
           <p:nvPr/>
         </p:nvSpPr>
@@ -43884,7 +43606,7 @@
       </p:sp>
       <p:sp>
         <p:nvSpPr>
-          <p:cNvPr id="150" name="Text 148"/>
+          <p:cNvPr id="142" name="Text 140"/>
           <p:cNvSpPr txBox="1"/>
           <p:nvPr/>
         </p:nvSpPr>
@@ -43923,7 +43645,7 @@
       </p:sp>
       <p:sp>
         <p:nvSpPr>
-          <p:cNvPr id="151" name="Shape 149"/>
+          <p:cNvPr id="143" name="Shape 141"/>
           <p:cNvSpPr/>
           <p:nvPr/>
         </p:nvSpPr>
@@ -43943,7 +43665,7 @@
       </p:sp>
       <p:sp>
         <p:nvSpPr>
-          <p:cNvPr id="152" name="Text 150"/>
+          <p:cNvPr id="144" name="Text 142"/>
           <p:cNvSpPr txBox="1"/>
           <p:nvPr/>
         </p:nvSpPr>
@@ -43982,7 +43704,7 @@
       </p:sp>
       <p:sp>
         <p:nvSpPr>
-          <p:cNvPr id="153" name="Text 151"/>
+          <p:cNvPr id="145" name="Text 143"/>
           <p:cNvSpPr txBox="1"/>
           <p:nvPr/>
         </p:nvSpPr>
@@ -44021,7 +43743,7 @@
       </p:sp>
       <p:sp>
         <p:nvSpPr>
-          <p:cNvPr id="154" name="Text 152"/>
+          <p:cNvPr id="146" name="Text 144"/>
           <p:cNvSpPr txBox="1"/>
           <p:nvPr/>
         </p:nvSpPr>
@@ -44060,7 +43782,7 @@
       </p:sp>
       <p:sp>
         <p:nvSpPr>
-          <p:cNvPr id="155" name="Text 153"/>
+          <p:cNvPr id="147" name="Text 145"/>
           <p:cNvSpPr txBox="1"/>
           <p:nvPr/>
         </p:nvSpPr>
@@ -44091,7 +43813,7 @@
                 <a:ea typeface="Poppins" pitchFamily="34" charset="-122"/>
                 <a:cs typeface="Poppins" pitchFamily="34" charset="-120"/>
               </a:rPr>
-              <a:t>26.0%</a:t>
+              <a:t>33.4%</a:t>
             </a:r>
             <a:endParaRPr lang="en-US" sz="750" dirty="0"/>
           </a:p>
@@ -44099,7 +43821,7 @@
       </p:sp>
       <p:sp>
         <p:nvSpPr>
-          <p:cNvPr id="156" name="Text 154"/>
+          <p:cNvPr id="148" name="Text 146"/>
           <p:cNvSpPr txBox="1"/>
           <p:nvPr/>
         </p:nvSpPr>
@@ -44138,7 +43860,7 @@
       </p:sp>
       <p:sp>
         <p:nvSpPr>
-          <p:cNvPr id="157" name="Text 155"/>
+          <p:cNvPr id="149" name="Text 147"/>
           <p:cNvSpPr txBox="1"/>
           <p:nvPr/>
         </p:nvSpPr>
@@ -44169,7 +43891,7 @@
                 <a:ea typeface="Poppins" pitchFamily="34" charset="-122"/>
                 <a:cs typeface="Poppins" pitchFamily="34" charset="-120"/>
               </a:rPr>
-              <a:t>Every closed week has restated upward since first reporting. Base held at 9 PS staff × 38h. A 722h record on 21–27 Sep is excluded as a keying error.</a:t>
+              <a:t>Base is available staff × 38h: 9 for the first three weeks, 7 for 28 Sep–4 Oct with Rhys Woolcock and Rodney Nolan on leave. Every closed week has restated upward since first reporting. A 722h record on 21–27 Sep is excluded as a keying error.</a:t>
             </a:r>
             <a:endParaRPr lang="en-US" sz="580" dirty="0"/>
           </a:p>
@@ -44177,7 +43899,7 @@
       </p:sp>
       <p:sp>
         <p:nvSpPr>
-          <p:cNvPr id="158" name="Shape 156"/>
+          <p:cNvPr id="150" name="Shape 148"/>
           <p:cNvSpPr/>
           <p:nvPr/>
         </p:nvSpPr>
@@ -44206,7 +43928,7 @@
       </p:sp>
       <p:sp>
         <p:nvSpPr>
-          <p:cNvPr id="159" name="Text 157"/>
+          <p:cNvPr id="151" name="Text 149"/>
           <p:cNvSpPr txBox="1"/>
           <p:nvPr/>
         </p:nvSpPr>
@@ -44245,7 +43967,7 @@
       </p:sp>
       <p:sp>
         <p:nvSpPr>
-          <p:cNvPr id="160" name="Text 158"/>
+          <p:cNvPr id="152" name="Text 150"/>
           <p:cNvSpPr txBox="1"/>
           <p:nvPr/>
         </p:nvSpPr>
@@ -44307,7 +44029,7 @@
                 <a:ea typeface="Poppins" pitchFamily="34" charset="-122"/>
                 <a:cs typeface="Poppins" pitchFamily="34" charset="-120"/>
               </a:rPr>
-              <a:t>21–27 Sep went out at 20.75h (6.1%) and now stands at 37.25h (10.9%); the two weeks before it have grown too. This week's 26% is a floor, not a result.</a:t>
+              <a:t>21–27 Sep went out at 20.75h (6.1%) and now stands at 37.25h (10.9%); the two weeks before it have grown too. This week's 33.4% is a floor, not a result.</a:t>
             </a:r>
             <a:endParaRPr lang="en-US" sz="900" dirty="0"/>
           </a:p>
@@ -44355,7 +44077,7 @@
                 <a:ea typeface="Poppins" pitchFamily="34" charset="-122"/>
                 <a:cs typeface="Poppins" pitchFamily="34" charset="-120"/>
               </a:rPr>
-              <a:t>Gregory St Clare-Hobbs 51.00h, of which 50.5h sits on one hardware record; Joshua Casey 37.87h across 21 items; 7 logged nothing. Strip that record and utilisation is 11.2%.</a:t>
+              <a:t>Gregory St Clare-Hobbs 51.00h, of which 50.5h sits on one hardware record; Joshua Casey 37.87h across 21 items; 5 logged nothing. Strip that record and utilisation is 14.4%.</a:t>
             </a:r>
             <a:endParaRPr lang="en-US" sz="900" dirty="0"/>
           </a:p>
@@ -44363,7 +44085,7 @@
       </p:sp>
       <p:sp>
         <p:nvSpPr>
-          <p:cNvPr id="161" name="Shape 159"/>
+          <p:cNvPr id="153" name="Shape 151"/>
           <p:cNvSpPr/>
           <p:nvPr/>
         </p:nvSpPr>
@@ -44385,7 +44107,7 @@
       </p:sp>
       <p:sp>
         <p:nvSpPr>
-          <p:cNvPr id="162" name="Text 160"/>
+          <p:cNvPr id="154" name="Text 152"/>
           <p:cNvSpPr txBox="1"/>
           <p:nvPr/>
         </p:nvSpPr>

--- a/exec-deck/output/H&L Weekly Update - WC 28 Sep 2026.pptx
+++ b/exec-deck/output/H&L Weekly Update - WC 28 Sep 2026.pptx
@@ -14251,7 +14251,7 @@
                 <a:ea typeface="Poppins" pitchFamily="34" charset="-122"/>
                 <a:cs typeface="Poppins" pitchFamily="34" charset="-120"/>
               </a:rPr>
-              <a:t>37 of 47</a:t>
+              <a:t>39 of 46</a:t>
             </a:r>
             <a:endParaRPr lang="en-US" sz="2600" dirty="0"/>
           </a:p>
@@ -14290,7 +14290,7 @@
                 <a:ea typeface="Poppins" pitchFamily="34" charset="-122"/>
                 <a:cs typeface="Poppins" pitchFamily="34" charset="-120"/>
               </a:rPr>
-              <a:t>weekly active · 10 daily · 43 monthly</a:t>
+              <a:t>weekly active · 19 daily · 42 monthly</a:t>
             </a:r>
             <a:endParaRPr lang="en-US" sz="780" dirty="0"/>
           </a:p>
@@ -14358,7 +14358,7 @@
                 <a:ea typeface="Poppins" pitchFamily="34" charset="-122"/>
                 <a:cs typeface="Poppins" pitchFamily="34" charset="-120"/>
               </a:rPr>
-              <a:t>LINES OF CODE — LAST WEEK</a:t>
+              <a:t>LINES OF CODE — OCT MTD</a:t>
             </a:r>
             <a:endParaRPr lang="en-US" sz="950" dirty="0"/>
           </a:p>
@@ -14397,7 +14397,7 @@
                 <a:ea typeface="Poppins" pitchFamily="34" charset="-122"/>
                 <a:cs typeface="Poppins" pitchFamily="34" charset="-120"/>
               </a:rPr>
-              <a:t>176,102 ▲</a:t>
+              <a:t>50,453 ▲</a:t>
             </a:r>
             <a:endParaRPr lang="en-US" sz="2400" dirty="0"/>
           </a:p>
@@ -14436,7 +14436,7 @@
                 <a:ea typeface="Poppins" pitchFamily="34" charset="-122"/>
                 <a:cs typeface="Poppins" pitchFamily="34" charset="-120"/>
               </a:rPr>
-              <a:t>week to 27 Sep · derived from the September month-to-date delta since the 20 Sep capture</a:t>
+              <a:t>1–6 Oct · October month-to-date; the admin capture gives month totals only, so there is no weekly split</a:t>
             </a:r>
             <a:endParaRPr lang="en-US" sz="780" dirty="0"/>
           </a:p>
@@ -14580,7 +14580,7 @@
         <p:spPr>
           <a:xfrm>
             <a:off x="7498080" y="1335024"/>
-            <a:ext cx="395021" cy="91440"/>
+            <a:ext cx="592531" cy="91440"/>
           </a:xfrm>
           <a:prstGeom prst="roundRect">
             <a:avLst>
@@ -14626,7 +14626,7 @@
                 <a:ea typeface="Poppins" pitchFamily="34" charset="-122"/>
                 <a:cs typeface="Poppins" pitchFamily="34" charset="-120"/>
               </a:rPr>
-              <a:t>12%</a:t>
+              <a:t>18%</a:t>
             </a:r>
             <a:endParaRPr lang="en-US" sz="800" dirty="0"/>
           </a:p>
@@ -14702,7 +14702,7 @@
         <p:spPr>
           <a:xfrm>
             <a:off x="7498080" y="1517904"/>
-            <a:ext cx="757123" cy="91440"/>
+            <a:ext cx="1086307" cy="91440"/>
           </a:xfrm>
           <a:prstGeom prst="roundRect">
             <a:avLst>
@@ -14748,7 +14748,7 @@
                 <a:ea typeface="Poppins" pitchFamily="34" charset="-122"/>
                 <a:cs typeface="Poppins" pitchFamily="34" charset="-120"/>
               </a:rPr>
-              <a:t>23%</a:t>
+              <a:t>33%</a:t>
             </a:r>
             <a:endParaRPr lang="en-US" sz="800" dirty="0"/>
           </a:p>
@@ -14824,7 +14824,7 @@
         <p:spPr>
           <a:xfrm>
             <a:off x="7498080" y="1700784"/>
-            <a:ext cx="230429" cy="91440"/>
+            <a:ext cx="954634" cy="91440"/>
           </a:xfrm>
           <a:prstGeom prst="roundRect">
             <a:avLst>
@@ -14870,7 +14870,7 @@
                 <a:ea typeface="Poppins" pitchFamily="34" charset="-122"/>
                 <a:cs typeface="Poppins" pitchFamily="34" charset="-120"/>
               </a:rPr>
-              <a:t>7%</a:t>
+              <a:t>29%</a:t>
             </a:r>
             <a:endParaRPr lang="en-US" sz="800" dirty="0"/>
           </a:p>
@@ -14946,11 +14946,11 @@
         <p:spPr>
           <a:xfrm>
             <a:off x="7498080" y="1883664"/>
-            <a:ext cx="45720" cy="91440"/>
+            <a:ext cx="362102" cy="91440"/>
           </a:xfrm>
           <a:prstGeom prst="roundRect">
             <a:avLst>
-              <a:gd name="adj" fmla="val 80000"/>
+              <a:gd name="adj" fmla="val 40000"/>
             </a:avLst>
           </a:prstGeom>
           <a:solidFill>
@@ -14992,7 +14992,7 @@
                 <a:ea typeface="Poppins" pitchFamily="34" charset="-122"/>
                 <a:cs typeface="Poppins" pitchFamily="34" charset="-120"/>
               </a:rPr>
-              <a:t>0%</a:t>
+              <a:t>11%</a:t>
             </a:r>
             <a:endParaRPr lang="en-US" sz="800" dirty="0"/>
           </a:p>
@@ -15099,7 +15099,7 @@
                 <a:ea typeface="Poppins" pitchFamily="34" charset="-122"/>
                 <a:cs typeface="Poppins" pitchFamily="34" charset="-120"/>
               </a:rPr>
-              <a:t>Jun</a:t>
+              <a:t>Jul</a:t>
             </a:r>
             <a:endParaRPr lang="en-US" sz="800" dirty="0"/>
           </a:p>
@@ -15138,7 +15138,7 @@
                 <a:ea typeface="Poppins" pitchFamily="34" charset="-122"/>
                 <a:cs typeface="Poppins" pitchFamily="34" charset="-120"/>
               </a:rPr>
-              <a:t>Jul</a:t>
+              <a:t>Aug</a:t>
             </a:r>
             <a:endParaRPr lang="en-US" sz="800" dirty="0"/>
           </a:p>
@@ -15177,7 +15177,7 @@
                 <a:ea typeface="Poppins" pitchFamily="34" charset="-122"/>
                 <a:cs typeface="Poppins" pitchFamily="34" charset="-120"/>
               </a:rPr>
-              <a:t>Aug</a:t>
+              <a:t>Sep</a:t>
             </a:r>
             <a:endParaRPr lang="en-US" sz="800" dirty="0"/>
           </a:p>
@@ -15216,7 +15216,7 @@
                 <a:ea typeface="Poppins" pitchFamily="34" charset="-122"/>
                 <a:cs typeface="Poppins" pitchFamily="34" charset="-120"/>
               </a:rPr>
-              <a:t>Sep</a:t>
+              <a:t>Oct</a:t>
             </a:r>
             <a:endParaRPr lang="en-US" sz="800" dirty="0"/>
           </a:p>
@@ -15315,7 +15315,7 @@
             <a:avLst/>
           </a:prstGeom>
           <a:solidFill>
-            <a:srgbClr val="EDF5F7"/>
+            <a:srgbClr val="D4E9ED"/>
           </a:solidFill>
           <a:ln/>
         </p:spPr>
@@ -15353,7 +15353,7 @@
                 <a:ea typeface="Poppins" pitchFamily="34" charset="-122"/>
                 <a:cs typeface="Poppins" pitchFamily="34" charset="-120"/>
               </a:rPr>
-              <a:t>10,351</a:t>
+              <a:t>39,579</a:t>
             </a:r>
             <a:endParaRPr lang="en-US" sz="680" dirty="0"/>
           </a:p>
@@ -15412,7 +15412,7 @@
                 <a:ea typeface="Poppins" pitchFamily="34" charset="-122"/>
                 <a:cs typeface="Poppins" pitchFamily="34" charset="-120"/>
               </a:rPr>
-              <a:t>39,579</a:t>
+              <a:t>41,244</a:t>
             </a:r>
             <a:endParaRPr lang="en-US" sz="680" dirty="0"/>
           </a:p>
@@ -15433,7 +15433,7 @@
             <a:avLst/>
           </a:prstGeom>
           <a:solidFill>
-            <a:srgbClr val="D4E9ED"/>
+            <a:srgbClr val="EDF5F7"/>
           </a:solidFill>
           <a:ln/>
         </p:spPr>
@@ -15471,7 +15471,7 @@
                 <a:ea typeface="Poppins" pitchFamily="34" charset="-122"/>
                 <a:cs typeface="Poppins" pitchFamily="34" charset="-120"/>
               </a:rPr>
-              <a:t>41,244</a:t>
+              <a:t>15,821</a:t>
             </a:r>
             <a:endParaRPr lang="en-US" sz="680" dirty="0"/>
           </a:p>
@@ -15479,27 +15479,7 @@
       </p:sp>
       <p:sp>
         <p:nvSpPr>
-          <p:cNvPr id="53" name="Shape 51"/>
-          <p:cNvSpPr/>
-          <p:nvPr/>
-        </p:nvSpPr>
-        <p:spPr>
-          <a:xfrm>
-            <a:off x="5321808" y="2823667"/>
-            <a:ext cx="996696" cy="150876"/>
-          </a:xfrm>
-          <a:prstGeom prst="rect">
-            <a:avLst/>
-          </a:prstGeom>
-          <a:solidFill>
-            <a:srgbClr val="EDF5F7"/>
-          </a:solidFill>
-          <a:ln/>
-        </p:spPr>
-      </p:sp>
-      <p:sp>
-        <p:nvSpPr>
-          <p:cNvPr id="54" name="Text 52"/>
+          <p:cNvPr id="53" name="Text 51"/>
           <p:cNvSpPr txBox="1"/>
           <p:nvPr/>
         </p:nvSpPr>
@@ -15524,13 +15504,13 @@
             <a:r>
               <a:rPr lang="en-US" sz="680" dirty="0">
                 <a:solidFill>
-                  <a:srgbClr val="12293A"/>
-                </a:solidFill>
-                <a:latin typeface="Poppins" pitchFamily="34" charset="0"/>
-                <a:ea typeface="Poppins" pitchFamily="34" charset="-122"/>
-                <a:cs typeface="Poppins" pitchFamily="34" charset="-120"/>
-              </a:rPr>
-              <a:t>15,821</a:t>
+                  <a:srgbClr val="8FA1AC"/>
+                </a:solidFill>
+                <a:latin typeface="Poppins" pitchFamily="34" charset="0"/>
+                <a:ea typeface="Poppins" pitchFamily="34" charset="-122"/>
+                <a:cs typeface="Poppins" pitchFamily="34" charset="-120"/>
+              </a:rPr>
+              <a:t>—</a:t>
             </a:r>
             <a:endParaRPr lang="en-US" sz="680" dirty="0"/>
           </a:p>
@@ -15538,7 +15518,7 @@
       </p:sp>
       <p:sp>
         <p:nvSpPr>
-          <p:cNvPr id="55" name="Text 53"/>
+          <p:cNvPr id="54" name="Text 52"/>
           <p:cNvSpPr txBox="1"/>
           <p:nvPr/>
         </p:nvSpPr>
@@ -15569,7 +15549,7 @@
                 <a:ea typeface="Poppins" pitchFamily="34" charset="-122"/>
                 <a:cs typeface="Poppins" pitchFamily="34" charset="-120"/>
               </a:rPr>
-              <a:t>106,995</a:t>
+              <a:t>96,644</a:t>
             </a:r>
             <a:endParaRPr lang="en-US" sz="700" dirty="0"/>
           </a:p>
@@ -15577,7 +15557,7 @@
       </p:sp>
       <p:sp>
         <p:nvSpPr>
-          <p:cNvPr id="56" name="Text 54"/>
+          <p:cNvPr id="55" name="Text 53"/>
           <p:cNvSpPr txBox="1"/>
           <p:nvPr/>
         </p:nvSpPr>
@@ -15616,7 +15596,7 @@
       </p:sp>
       <p:sp>
         <p:nvSpPr>
-          <p:cNvPr id="57" name="Shape 55"/>
+          <p:cNvPr id="56" name="Shape 54"/>
           <p:cNvSpPr/>
           <p:nvPr/>
         </p:nvSpPr>
@@ -15636,7 +15616,7 @@
       </p:sp>
       <p:sp>
         <p:nvSpPr>
-          <p:cNvPr id="58" name="Text 56"/>
+          <p:cNvPr id="57" name="Text 55"/>
           <p:cNvSpPr txBox="1"/>
           <p:nvPr/>
         </p:nvSpPr>
@@ -15667,7 +15647,7 @@
                 <a:ea typeface="Poppins" pitchFamily="34" charset="-122"/>
                 <a:cs typeface="Poppins" pitchFamily="34" charset="-120"/>
               </a:rPr>
-              <a:t>18,954</a:t>
+              <a:t>15,834</a:t>
             </a:r>
             <a:endParaRPr lang="en-US" sz="680" dirty="0"/>
           </a:p>
@@ -15675,7 +15655,7 @@
       </p:sp>
       <p:sp>
         <p:nvSpPr>
-          <p:cNvPr id="59" name="Shape 57"/>
+          <p:cNvPr id="58" name="Shape 56"/>
           <p:cNvSpPr/>
           <p:nvPr/>
         </p:nvSpPr>
@@ -15688,14 +15668,14 @@
             <a:avLst/>
           </a:prstGeom>
           <a:solidFill>
-            <a:srgbClr val="EDF5F7"/>
-          </a:solidFill>
-          <a:ln/>
-        </p:spPr>
-      </p:sp>
-      <p:sp>
-        <p:nvSpPr>
-          <p:cNvPr id="60" name="Text 58"/>
+            <a:srgbClr val="D4E9ED"/>
+          </a:solidFill>
+          <a:ln/>
+        </p:spPr>
+      </p:sp>
+      <p:sp>
+        <p:nvSpPr>
+          <p:cNvPr id="59" name="Text 57"/>
           <p:cNvSpPr txBox="1"/>
           <p:nvPr/>
         </p:nvSpPr>
@@ -15726,7 +15706,7 @@
                 <a:ea typeface="Poppins" pitchFamily="34" charset="-122"/>
                 <a:cs typeface="Poppins" pitchFamily="34" charset="-120"/>
               </a:rPr>
-              <a:t>15,834</a:t>
+              <a:t>38,142</a:t>
             </a:r>
             <a:endParaRPr lang="en-US" sz="680" dirty="0"/>
           </a:p>
@@ -15734,7 +15714,7 @@
       </p:sp>
       <p:sp>
         <p:nvSpPr>
-          <p:cNvPr id="61" name="Shape 59"/>
+          <p:cNvPr id="60" name="Shape 58"/>
           <p:cNvSpPr/>
           <p:nvPr/>
         </p:nvSpPr>
@@ -15747,14 +15727,14 @@
             <a:avLst/>
           </a:prstGeom>
           <a:solidFill>
-            <a:srgbClr val="D4E9ED"/>
-          </a:solidFill>
-          <a:ln/>
-        </p:spPr>
-      </p:sp>
-      <p:sp>
-        <p:nvSpPr>
-          <p:cNvPr id="62" name="Text 60"/>
+            <a:srgbClr val="8FC3CC"/>
+          </a:solidFill>
+          <a:ln/>
+        </p:spPr>
+      </p:sp>
+      <p:sp>
+        <p:nvSpPr>
+          <p:cNvPr id="61" name="Text 59"/>
           <p:cNvSpPr txBox="1"/>
           <p:nvPr/>
         </p:nvSpPr>
@@ -15785,7 +15765,7 @@
                 <a:ea typeface="Poppins" pitchFamily="34" charset="-122"/>
                 <a:cs typeface="Poppins" pitchFamily="34" charset="-120"/>
               </a:rPr>
-              <a:t>38,142</a:t>
+              <a:t>99,693</a:t>
             </a:r>
             <a:endParaRPr lang="en-US" sz="680" dirty="0"/>
           </a:p>
@@ -15793,7 +15773,7 @@
       </p:sp>
       <p:sp>
         <p:nvSpPr>
-          <p:cNvPr id="63" name="Shape 61"/>
+          <p:cNvPr id="62" name="Shape 60"/>
           <p:cNvSpPr/>
           <p:nvPr/>
         </p:nvSpPr>
@@ -15806,14 +15786,14 @@
             <a:avLst/>
           </a:prstGeom>
           <a:solidFill>
-            <a:srgbClr val="8FC3CC"/>
-          </a:solidFill>
-          <a:ln/>
-        </p:spPr>
-      </p:sp>
-      <p:sp>
-        <p:nvSpPr>
-          <p:cNvPr id="64" name="Text 62"/>
+            <a:srgbClr val="D4E9ED"/>
+          </a:solidFill>
+          <a:ln/>
+        </p:spPr>
+      </p:sp>
+      <p:sp>
+        <p:nvSpPr>
+          <p:cNvPr id="63" name="Text 61"/>
           <p:cNvSpPr txBox="1"/>
           <p:nvPr/>
         </p:nvSpPr>
@@ -15844,7 +15824,7 @@
                 <a:ea typeface="Poppins" pitchFamily="34" charset="-122"/>
                 <a:cs typeface="Poppins" pitchFamily="34" charset="-120"/>
               </a:rPr>
-              <a:t>99,693</a:t>
+              <a:t>39,709</a:t>
             </a:r>
             <a:endParaRPr lang="en-US" sz="680" dirty="0"/>
           </a:p>
@@ -15852,7 +15832,7 @@
       </p:sp>
       <p:sp>
         <p:nvSpPr>
-          <p:cNvPr id="65" name="Text 63"/>
+          <p:cNvPr id="64" name="Text 62"/>
           <p:cNvSpPr txBox="1"/>
           <p:nvPr/>
         </p:nvSpPr>
@@ -15883,7 +15863,7 @@
                 <a:ea typeface="Poppins" pitchFamily="34" charset="-122"/>
                 <a:cs typeface="Poppins" pitchFamily="34" charset="-120"/>
               </a:rPr>
-              <a:t>172,623</a:t>
+              <a:t>193,378</a:t>
             </a:r>
             <a:endParaRPr lang="en-US" sz="700" dirty="0"/>
           </a:p>
@@ -15891,7 +15871,7 @@
       </p:sp>
       <p:sp>
         <p:nvSpPr>
-          <p:cNvPr id="66" name="Text 64"/>
+          <p:cNvPr id="65" name="Text 63"/>
           <p:cNvSpPr txBox="1"/>
           <p:nvPr/>
         </p:nvSpPr>
@@ -15930,7 +15910,7 @@
       </p:sp>
       <p:sp>
         <p:nvSpPr>
-          <p:cNvPr id="67" name="Shape 65"/>
+          <p:cNvPr id="66" name="Shape 64"/>
           <p:cNvSpPr/>
           <p:nvPr/>
         </p:nvSpPr>
@@ -15950,7 +15930,7 @@
       </p:sp>
       <p:sp>
         <p:nvSpPr>
-          <p:cNvPr id="68" name="Text 66"/>
+          <p:cNvPr id="67" name="Text 65"/>
           <p:cNvSpPr txBox="1"/>
           <p:nvPr/>
         </p:nvSpPr>
@@ -15981,7 +15961,7 @@
                 <a:ea typeface="Poppins" pitchFamily="34" charset="-122"/>
                 <a:cs typeface="Poppins" pitchFamily="34" charset="-120"/>
               </a:rPr>
-              <a:t>22,385</a:t>
+              <a:t>28,536</a:t>
             </a:r>
             <a:endParaRPr lang="en-US" sz="680" dirty="0"/>
           </a:p>
@@ -15989,7 +15969,7 @@
       </p:sp>
       <p:sp>
         <p:nvSpPr>
-          <p:cNvPr id="69" name="Shape 67"/>
+          <p:cNvPr id="68" name="Shape 66"/>
           <p:cNvSpPr/>
           <p:nvPr/>
         </p:nvSpPr>
@@ -16009,7 +15989,7 @@
       </p:sp>
       <p:sp>
         <p:nvSpPr>
-          <p:cNvPr id="70" name="Text 68"/>
+          <p:cNvPr id="69" name="Text 67"/>
           <p:cNvSpPr txBox="1"/>
           <p:nvPr/>
         </p:nvSpPr>
@@ -16040,7 +16020,7 @@
                 <a:ea typeface="Poppins" pitchFamily="34" charset="-122"/>
                 <a:cs typeface="Poppins" pitchFamily="34" charset="-120"/>
               </a:rPr>
-              <a:t>28,536</a:t>
+              <a:t>23,285</a:t>
             </a:r>
             <a:endParaRPr lang="en-US" sz="680" dirty="0"/>
           </a:p>
@@ -16048,7 +16028,7 @@
       </p:sp>
       <p:sp>
         <p:nvSpPr>
-          <p:cNvPr id="71" name="Shape 69"/>
+          <p:cNvPr id="70" name="Shape 68"/>
           <p:cNvSpPr/>
           <p:nvPr/>
         </p:nvSpPr>
@@ -16061,14 +16041,14 @@
             <a:avLst/>
           </a:prstGeom>
           <a:solidFill>
-            <a:srgbClr val="D4E9ED"/>
-          </a:solidFill>
-          <a:ln/>
-        </p:spPr>
-      </p:sp>
-      <p:sp>
-        <p:nvSpPr>
-          <p:cNvPr id="72" name="Text 70"/>
+            <a:srgbClr val="EDF5F7"/>
+          </a:solidFill>
+          <a:ln/>
+        </p:spPr>
+      </p:sp>
+      <p:sp>
+        <p:nvSpPr>
+          <p:cNvPr id="71" name="Text 69"/>
           <p:cNvSpPr txBox="1"/>
           <p:nvPr/>
         </p:nvSpPr>
@@ -16099,7 +16079,7 @@
                 <a:ea typeface="Poppins" pitchFamily="34" charset="-122"/>
                 <a:cs typeface="Poppins" pitchFamily="34" charset="-120"/>
               </a:rPr>
-              <a:t>23,285</a:t>
+              <a:t>19,047</a:t>
             </a:r>
             <a:endParaRPr lang="en-US" sz="680" dirty="0"/>
           </a:p>
@@ -16107,27 +16087,7 @@
       </p:sp>
       <p:sp>
         <p:nvSpPr>
-          <p:cNvPr id="73" name="Shape 71"/>
-          <p:cNvSpPr/>
-          <p:nvPr/>
-        </p:nvSpPr>
-        <p:spPr>
-          <a:xfrm>
-            <a:off x="5321808" y="3171139"/>
-            <a:ext cx="996696" cy="150876"/>
-          </a:xfrm>
-          <a:prstGeom prst="rect">
-            <a:avLst/>
-          </a:prstGeom>
-          <a:solidFill>
-            <a:srgbClr val="EDF5F7"/>
-          </a:solidFill>
-          <a:ln/>
-        </p:spPr>
-      </p:sp>
-      <p:sp>
-        <p:nvSpPr>
-          <p:cNvPr id="74" name="Text 72"/>
+          <p:cNvPr id="72" name="Text 70"/>
           <p:cNvSpPr txBox="1"/>
           <p:nvPr/>
         </p:nvSpPr>
@@ -16152,13 +16112,13 @@
             <a:r>
               <a:rPr lang="en-US" sz="680" dirty="0">
                 <a:solidFill>
-                  <a:srgbClr val="12293A"/>
-                </a:solidFill>
-                <a:latin typeface="Poppins" pitchFamily="34" charset="0"/>
-                <a:ea typeface="Poppins" pitchFamily="34" charset="-122"/>
-                <a:cs typeface="Poppins" pitchFamily="34" charset="-120"/>
-              </a:rPr>
-              <a:t>19,047</a:t>
+                  <a:srgbClr val="8FA1AC"/>
+                </a:solidFill>
+                <a:latin typeface="Poppins" pitchFamily="34" charset="0"/>
+                <a:ea typeface="Poppins" pitchFamily="34" charset="-122"/>
+                <a:cs typeface="Poppins" pitchFamily="34" charset="-120"/>
+              </a:rPr>
+              <a:t>—</a:t>
             </a:r>
             <a:endParaRPr lang="en-US" sz="680" dirty="0"/>
           </a:p>
@@ -16166,7 +16126,7 @@
       </p:sp>
       <p:sp>
         <p:nvSpPr>
-          <p:cNvPr id="75" name="Text 73"/>
+          <p:cNvPr id="73" name="Text 71"/>
           <p:cNvSpPr txBox="1"/>
           <p:nvPr/>
         </p:nvSpPr>
@@ -16197,7 +16157,7 @@
                 <a:ea typeface="Poppins" pitchFamily="34" charset="-122"/>
                 <a:cs typeface="Poppins" pitchFamily="34" charset="-120"/>
               </a:rPr>
-              <a:t>93,253</a:t>
+              <a:t>70,868</a:t>
             </a:r>
             <a:endParaRPr lang="en-US" sz="700" dirty="0"/>
           </a:p>
@@ -16205,7 +16165,7 @@
       </p:sp>
       <p:sp>
         <p:nvSpPr>
-          <p:cNvPr id="76" name="Text 74"/>
+          <p:cNvPr id="74" name="Text 72"/>
           <p:cNvSpPr txBox="1"/>
           <p:nvPr/>
         </p:nvSpPr>
@@ -16244,7 +16204,7 @@
       </p:sp>
       <p:sp>
         <p:nvSpPr>
-          <p:cNvPr id="77" name="Shape 75"/>
+          <p:cNvPr id="75" name="Shape 73"/>
           <p:cNvSpPr/>
           <p:nvPr/>
         </p:nvSpPr>
@@ -16264,7 +16224,7 @@
       </p:sp>
       <p:sp>
         <p:nvSpPr>
-          <p:cNvPr id="78" name="Text 76"/>
+          <p:cNvPr id="76" name="Text 74"/>
           <p:cNvSpPr txBox="1"/>
           <p:nvPr/>
         </p:nvSpPr>
@@ -16295,7 +16255,7 @@
                 <a:ea typeface="Poppins" pitchFamily="34" charset="-122"/>
                 <a:cs typeface="Poppins" pitchFamily="34" charset="-120"/>
               </a:rPr>
-              <a:t>6,280</a:t>
+              <a:t>18,918</a:t>
             </a:r>
             <a:endParaRPr lang="en-US" sz="680" dirty="0"/>
           </a:p>
@@ -16303,7 +16263,7 @@
       </p:sp>
       <p:sp>
         <p:nvSpPr>
-          <p:cNvPr id="79" name="Shape 77"/>
+          <p:cNvPr id="77" name="Shape 75"/>
           <p:cNvSpPr/>
           <p:nvPr/>
         </p:nvSpPr>
@@ -16316,14 +16276,14 @@
             <a:avLst/>
           </a:prstGeom>
           <a:solidFill>
-            <a:srgbClr val="EDF5F7"/>
-          </a:solidFill>
-          <a:ln/>
-        </p:spPr>
-      </p:sp>
-      <p:sp>
-        <p:nvSpPr>
-          <p:cNvPr id="80" name="Text 78"/>
+            <a:srgbClr val="D4E9ED"/>
+          </a:solidFill>
+          <a:ln/>
+        </p:spPr>
+      </p:sp>
+      <p:sp>
+        <p:nvSpPr>
+          <p:cNvPr id="78" name="Text 76"/>
           <p:cNvSpPr txBox="1"/>
           <p:nvPr/>
         </p:nvSpPr>
@@ -16354,7 +16314,7 @@
                 <a:ea typeface="Poppins" pitchFamily="34" charset="-122"/>
                 <a:cs typeface="Poppins" pitchFamily="34" charset="-120"/>
               </a:rPr>
-              <a:t>18,918</a:t>
+              <a:t>23,650</a:t>
             </a:r>
             <a:endParaRPr lang="en-US" sz="680" dirty="0"/>
           </a:p>
@@ -16362,7 +16322,7 @@
       </p:sp>
       <p:sp>
         <p:nvSpPr>
-          <p:cNvPr id="81" name="Shape 79"/>
+          <p:cNvPr id="79" name="Shape 77"/>
           <p:cNvSpPr/>
           <p:nvPr/>
         </p:nvSpPr>
@@ -16382,7 +16342,7 @@
       </p:sp>
       <p:sp>
         <p:nvSpPr>
-          <p:cNvPr id="82" name="Text 80"/>
+          <p:cNvPr id="80" name="Text 78"/>
           <p:cNvSpPr txBox="1"/>
           <p:nvPr/>
         </p:nvSpPr>
@@ -16413,7 +16373,7 @@
                 <a:ea typeface="Poppins" pitchFamily="34" charset="-122"/>
                 <a:cs typeface="Poppins" pitchFamily="34" charset="-120"/>
               </a:rPr>
-              <a:t>23,650</a:t>
+              <a:t>24,443</a:t>
             </a:r>
             <a:endParaRPr lang="en-US" sz="680" dirty="0"/>
           </a:p>
@@ -16421,7 +16381,7 @@
       </p:sp>
       <p:sp>
         <p:nvSpPr>
-          <p:cNvPr id="83" name="Shape 81"/>
+          <p:cNvPr id="81" name="Shape 79"/>
           <p:cNvSpPr/>
           <p:nvPr/>
         </p:nvSpPr>
@@ -16434,14 +16394,14 @@
             <a:avLst/>
           </a:prstGeom>
           <a:solidFill>
-            <a:srgbClr val="D4E9ED"/>
-          </a:solidFill>
-          <a:ln/>
-        </p:spPr>
-      </p:sp>
-      <p:sp>
-        <p:nvSpPr>
-          <p:cNvPr id="84" name="Text 82"/>
+            <a:srgbClr val="EDF5F7"/>
+          </a:solidFill>
+          <a:ln/>
+        </p:spPr>
+      </p:sp>
+      <p:sp>
+        <p:nvSpPr>
+          <p:cNvPr id="82" name="Text 80"/>
           <p:cNvSpPr txBox="1"/>
           <p:nvPr/>
         </p:nvSpPr>
@@ -16472,7 +16432,7 @@
                 <a:ea typeface="Poppins" pitchFamily="34" charset="-122"/>
                 <a:cs typeface="Poppins" pitchFamily="34" charset="-120"/>
               </a:rPr>
-              <a:t>24,443</a:t>
+              <a:t>210</a:t>
             </a:r>
             <a:endParaRPr lang="en-US" sz="680" dirty="0"/>
           </a:p>
@@ -16480,7 +16440,7 @@
       </p:sp>
       <p:sp>
         <p:nvSpPr>
-          <p:cNvPr id="85" name="Text 83"/>
+          <p:cNvPr id="83" name="Text 81"/>
           <p:cNvSpPr txBox="1"/>
           <p:nvPr/>
         </p:nvSpPr>
@@ -16511,7 +16471,7 @@
                 <a:ea typeface="Poppins" pitchFamily="34" charset="-122"/>
                 <a:cs typeface="Poppins" pitchFamily="34" charset="-120"/>
               </a:rPr>
-              <a:t>73,291</a:t>
+              <a:t>67,221</a:t>
             </a:r>
             <a:endParaRPr lang="en-US" sz="700" dirty="0"/>
           </a:p>
@@ -16519,7 +16479,7 @@
       </p:sp>
       <p:sp>
         <p:nvSpPr>
-          <p:cNvPr id="86" name="Text 84"/>
+          <p:cNvPr id="84" name="Text 82"/>
           <p:cNvSpPr txBox="1"/>
           <p:nvPr/>
         </p:nvSpPr>
@@ -16558,7 +16518,7 @@
       </p:sp>
       <p:sp>
         <p:nvSpPr>
-          <p:cNvPr id="87" name="Shape 85"/>
+          <p:cNvPr id="85" name="Shape 83"/>
           <p:cNvSpPr/>
           <p:nvPr/>
         </p:nvSpPr>
@@ -16571,14 +16531,14 @@
             <a:avLst/>
           </a:prstGeom>
           <a:solidFill>
-            <a:srgbClr val="EDF5F7"/>
-          </a:solidFill>
-          <a:ln/>
-        </p:spPr>
-      </p:sp>
-      <p:sp>
-        <p:nvSpPr>
-          <p:cNvPr id="88" name="Text 86"/>
+            <a:srgbClr val="D4E9ED"/>
+          </a:solidFill>
+          <a:ln/>
+        </p:spPr>
+      </p:sp>
+      <p:sp>
+        <p:nvSpPr>
+          <p:cNvPr id="86" name="Text 84"/>
           <p:cNvSpPr txBox="1"/>
           <p:nvPr/>
         </p:nvSpPr>
@@ -16609,7 +16569,7 @@
                 <a:ea typeface="Poppins" pitchFamily="34" charset="-122"/>
                 <a:cs typeface="Poppins" pitchFamily="34" charset="-120"/>
               </a:rPr>
-              <a:t>10,549</a:t>
+              <a:t>27,031</a:t>
             </a:r>
             <a:endParaRPr lang="en-US" sz="680" dirty="0"/>
           </a:p>
@@ -16617,7 +16577,7 @@
       </p:sp>
       <p:sp>
         <p:nvSpPr>
-          <p:cNvPr id="89" name="Shape 87"/>
+          <p:cNvPr id="87" name="Shape 85"/>
           <p:cNvSpPr/>
           <p:nvPr/>
         </p:nvSpPr>
@@ -16630,14 +16590,14 @@
             <a:avLst/>
           </a:prstGeom>
           <a:solidFill>
-            <a:srgbClr val="D4E9ED"/>
-          </a:solidFill>
-          <a:ln/>
-        </p:spPr>
-      </p:sp>
-      <p:sp>
-        <p:nvSpPr>
-          <p:cNvPr id="90" name="Text 88"/>
+            <a:srgbClr val="EDF5F7"/>
+          </a:solidFill>
+          <a:ln/>
+        </p:spPr>
+      </p:sp>
+      <p:sp>
+        <p:nvSpPr>
+          <p:cNvPr id="88" name="Text 86"/>
           <p:cNvSpPr txBox="1"/>
           <p:nvPr/>
         </p:nvSpPr>
@@ -16668,7 +16628,7 @@
                 <a:ea typeface="Poppins" pitchFamily="34" charset="-122"/>
                 <a:cs typeface="Poppins" pitchFamily="34" charset="-120"/>
               </a:rPr>
-              <a:t>27,031</a:t>
+              <a:t>10,145</a:t>
             </a:r>
             <a:endParaRPr lang="en-US" sz="680" dirty="0"/>
           </a:p>
@@ -16676,7 +16636,7 @@
       </p:sp>
       <p:sp>
         <p:nvSpPr>
-          <p:cNvPr id="91" name="Shape 89"/>
+          <p:cNvPr id="89" name="Shape 87"/>
           <p:cNvSpPr/>
           <p:nvPr/>
         </p:nvSpPr>
@@ -16689,14 +16649,14 @@
             <a:avLst/>
           </a:prstGeom>
           <a:solidFill>
-            <a:srgbClr val="EDF5F7"/>
-          </a:solidFill>
-          <a:ln/>
-        </p:spPr>
-      </p:sp>
-      <p:sp>
-        <p:nvSpPr>
-          <p:cNvPr id="92" name="Text 90"/>
+            <a:srgbClr val="D4E9ED"/>
+          </a:solidFill>
+          <a:ln/>
+        </p:spPr>
+      </p:sp>
+      <p:sp>
+        <p:nvSpPr>
+          <p:cNvPr id="90" name="Text 88"/>
           <p:cNvSpPr txBox="1"/>
           <p:nvPr/>
         </p:nvSpPr>
@@ -16727,7 +16687,7 @@
                 <a:ea typeface="Poppins" pitchFamily="34" charset="-122"/>
                 <a:cs typeface="Poppins" pitchFamily="34" charset="-120"/>
               </a:rPr>
-              <a:t>10,145</a:t>
+              <a:t>30,828</a:t>
             </a:r>
             <a:endParaRPr lang="en-US" sz="680" dirty="0"/>
           </a:p>
@@ -16735,7 +16695,7 @@
       </p:sp>
       <p:sp>
         <p:nvSpPr>
-          <p:cNvPr id="93" name="Shape 91"/>
+          <p:cNvPr id="91" name="Shape 89"/>
           <p:cNvSpPr/>
           <p:nvPr/>
         </p:nvSpPr>
@@ -16748,14 +16708,14 @@
             <a:avLst/>
           </a:prstGeom>
           <a:solidFill>
-            <a:srgbClr val="D4E9ED"/>
-          </a:solidFill>
-          <a:ln/>
-        </p:spPr>
-      </p:sp>
-      <p:sp>
-        <p:nvSpPr>
-          <p:cNvPr id="94" name="Text 92"/>
+            <a:srgbClr val="EDF5F7"/>
+          </a:solidFill>
+          <a:ln/>
+        </p:spPr>
+      </p:sp>
+      <p:sp>
+        <p:nvSpPr>
+          <p:cNvPr id="92" name="Text 90"/>
           <p:cNvSpPr txBox="1"/>
           <p:nvPr/>
         </p:nvSpPr>
@@ -16786,7 +16746,7 @@
                 <a:ea typeface="Poppins" pitchFamily="34" charset="-122"/>
                 <a:cs typeface="Poppins" pitchFamily="34" charset="-120"/>
               </a:rPr>
-              <a:t>30,828</a:t>
+              <a:t>3,067</a:t>
             </a:r>
             <a:endParaRPr lang="en-US" sz="680" dirty="0"/>
           </a:p>
@@ -16794,7 +16754,7 @@
       </p:sp>
       <p:sp>
         <p:nvSpPr>
-          <p:cNvPr id="95" name="Text 93"/>
+          <p:cNvPr id="93" name="Text 91"/>
           <p:cNvSpPr txBox="1"/>
           <p:nvPr/>
         </p:nvSpPr>
@@ -16825,7 +16785,7 @@
                 <a:ea typeface="Poppins" pitchFamily="34" charset="-122"/>
                 <a:cs typeface="Poppins" pitchFamily="34" charset="-120"/>
               </a:rPr>
-              <a:t>78,553</a:t>
+              <a:t>71,071</a:t>
             </a:r>
             <a:endParaRPr lang="en-US" sz="700" dirty="0"/>
           </a:p>
@@ -16833,7 +16793,7 @@
       </p:sp>
       <p:sp>
         <p:nvSpPr>
-          <p:cNvPr id="96" name="Text 94"/>
+          <p:cNvPr id="94" name="Text 92"/>
           <p:cNvSpPr txBox="1"/>
           <p:nvPr/>
         </p:nvSpPr>
@@ -16872,7 +16832,7 @@
       </p:sp>
       <p:sp>
         <p:nvSpPr>
-          <p:cNvPr id="97" name="Shape 95"/>
+          <p:cNvPr id="95" name="Shape 93"/>
           <p:cNvSpPr/>
           <p:nvPr/>
         </p:nvSpPr>
@@ -16892,7 +16852,7 @@
       </p:sp>
       <p:sp>
         <p:nvSpPr>
-          <p:cNvPr id="98" name="Text 96"/>
+          <p:cNvPr id="96" name="Text 94"/>
           <p:cNvSpPr txBox="1"/>
           <p:nvPr/>
         </p:nvSpPr>
@@ -16923,7 +16883,7 @@
                 <a:ea typeface="Poppins" pitchFamily="34" charset="-122"/>
                 <a:cs typeface="Poppins" pitchFamily="34" charset="-120"/>
               </a:rPr>
-              <a:t>12,955</a:t>
+              <a:t>19,535</a:t>
             </a:r>
             <a:endParaRPr lang="en-US" sz="680" dirty="0"/>
           </a:p>
@@ -16931,7 +16891,7 @@
       </p:sp>
       <p:sp>
         <p:nvSpPr>
-          <p:cNvPr id="99" name="Shape 97"/>
+          <p:cNvPr id="97" name="Shape 95"/>
           <p:cNvSpPr/>
           <p:nvPr/>
         </p:nvSpPr>
@@ -16951,7 +16911,7 @@
       </p:sp>
       <p:sp>
         <p:nvSpPr>
-          <p:cNvPr id="100" name="Text 98"/>
+          <p:cNvPr id="98" name="Text 96"/>
           <p:cNvSpPr txBox="1"/>
           <p:nvPr/>
         </p:nvSpPr>
@@ -16982,7 +16942,7 @@
                 <a:ea typeface="Poppins" pitchFamily="34" charset="-122"/>
                 <a:cs typeface="Poppins" pitchFamily="34" charset="-120"/>
               </a:rPr>
-              <a:t>19,535</a:t>
+              <a:t>12,856</a:t>
             </a:r>
             <a:endParaRPr lang="en-US" sz="680" dirty="0"/>
           </a:p>
@@ -16990,7 +16950,7 @@
       </p:sp>
       <p:sp>
         <p:nvSpPr>
-          <p:cNvPr id="101" name="Shape 99"/>
+          <p:cNvPr id="99" name="Shape 97"/>
           <p:cNvSpPr/>
           <p:nvPr/>
         </p:nvSpPr>
@@ -17010,7 +16970,7 @@
       </p:sp>
       <p:sp>
         <p:nvSpPr>
-          <p:cNvPr id="102" name="Text 100"/>
+          <p:cNvPr id="100" name="Text 98"/>
           <p:cNvSpPr txBox="1"/>
           <p:nvPr/>
         </p:nvSpPr>
@@ -17041,7 +17001,7 @@
                 <a:ea typeface="Poppins" pitchFamily="34" charset="-122"/>
                 <a:cs typeface="Poppins" pitchFamily="34" charset="-120"/>
               </a:rPr>
-              <a:t>12,856</a:t>
+              <a:t>17,516</a:t>
             </a:r>
             <a:endParaRPr lang="en-US" sz="680" dirty="0"/>
           </a:p>
@@ -17049,7 +17009,7 @@
       </p:sp>
       <p:sp>
         <p:nvSpPr>
-          <p:cNvPr id="103" name="Shape 101"/>
+          <p:cNvPr id="101" name="Shape 99"/>
           <p:cNvSpPr/>
           <p:nvPr/>
         </p:nvSpPr>
@@ -17069,7 +17029,7 @@
       </p:sp>
       <p:sp>
         <p:nvSpPr>
-          <p:cNvPr id="104" name="Text 102"/>
+          <p:cNvPr id="102" name="Text 100"/>
           <p:cNvSpPr txBox="1"/>
           <p:nvPr/>
         </p:nvSpPr>
@@ -17100,7 +17060,7 @@
                 <a:ea typeface="Poppins" pitchFamily="34" charset="-122"/>
                 <a:cs typeface="Poppins" pitchFamily="34" charset="-120"/>
               </a:rPr>
-              <a:t>17,516</a:t>
+              <a:t>568</a:t>
             </a:r>
             <a:endParaRPr lang="en-US" sz="680" dirty="0"/>
           </a:p>
@@ -17108,7 +17068,7 @@
       </p:sp>
       <p:sp>
         <p:nvSpPr>
-          <p:cNvPr id="105" name="Text 103"/>
+          <p:cNvPr id="103" name="Text 101"/>
           <p:cNvSpPr txBox="1"/>
           <p:nvPr/>
         </p:nvSpPr>
@@ -17139,7 +17099,7 @@
                 <a:ea typeface="Poppins" pitchFamily="34" charset="-122"/>
                 <a:cs typeface="Poppins" pitchFamily="34" charset="-120"/>
               </a:rPr>
-              <a:t>62,862</a:t>
+              <a:t>50,475</a:t>
             </a:r>
             <a:endParaRPr lang="en-US" sz="700" dirty="0"/>
           </a:p>
@@ -17147,7 +17107,7 @@
       </p:sp>
       <p:sp>
         <p:nvSpPr>
-          <p:cNvPr id="106" name="Text 104"/>
+          <p:cNvPr id="104" name="Text 102"/>
           <p:cNvSpPr txBox="1"/>
           <p:nvPr/>
         </p:nvSpPr>
@@ -17186,7 +17146,7 @@
       </p:sp>
       <p:sp>
         <p:nvSpPr>
-          <p:cNvPr id="107" name="Text 105"/>
+          <p:cNvPr id="105" name="Text 103"/>
           <p:cNvSpPr txBox="1"/>
           <p:nvPr/>
         </p:nvSpPr>
@@ -17225,7 +17185,27 @@
       </p:sp>
       <p:sp>
         <p:nvSpPr>
-          <p:cNvPr id="108" name="Text 106"/>
+          <p:cNvPr id="106" name="Shape 104"/>
+          <p:cNvSpPr/>
+          <p:nvPr/>
+        </p:nvSpPr>
+        <p:spPr>
+          <a:xfrm>
+            <a:off x="3163824" y="3866083"/>
+            <a:ext cx="996696" cy="150876"/>
+          </a:xfrm>
+          <a:prstGeom prst="rect">
+            <a:avLst/>
+          </a:prstGeom>
+          <a:solidFill>
+            <a:srgbClr val="D4E9ED"/>
+          </a:solidFill>
+          <a:ln/>
+        </p:spPr>
+      </p:sp>
+      <p:sp>
+        <p:nvSpPr>
+          <p:cNvPr id="107" name="Text 105"/>
           <p:cNvSpPr txBox="1"/>
           <p:nvPr/>
         </p:nvSpPr>
@@ -17250,13 +17230,13 @@
             <a:r>
               <a:rPr lang="en-US" sz="680" dirty="0">
                 <a:solidFill>
-                  <a:srgbClr val="8FA1AC"/>
-                </a:solidFill>
-                <a:latin typeface="Poppins" pitchFamily="34" charset="0"/>
-                <a:ea typeface="Poppins" pitchFamily="34" charset="-122"/>
-                <a:cs typeface="Poppins" pitchFamily="34" charset="-120"/>
-              </a:rPr>
-              <a:t>—</a:t>
+                  <a:srgbClr val="12293A"/>
+                </a:solidFill>
+                <a:latin typeface="Poppins" pitchFamily="34" charset="0"/>
+                <a:ea typeface="Poppins" pitchFamily="34" charset="-122"/>
+                <a:cs typeface="Poppins" pitchFamily="34" charset="-120"/>
+              </a:rPr>
+              <a:t>42,859</a:t>
             </a:r>
             <a:endParaRPr lang="en-US" sz="680" dirty="0"/>
           </a:p>
@@ -17264,7 +17244,7 @@
       </p:sp>
       <p:sp>
         <p:nvSpPr>
-          <p:cNvPr id="109" name="Shape 107"/>
+          <p:cNvPr id="108" name="Shape 106"/>
           <p:cNvSpPr/>
           <p:nvPr/>
         </p:nvSpPr>
@@ -17284,7 +17264,7 @@
       </p:sp>
       <p:sp>
         <p:nvSpPr>
-          <p:cNvPr id="110" name="Text 108"/>
+          <p:cNvPr id="109" name="Text 107"/>
           <p:cNvSpPr txBox="1"/>
           <p:nvPr/>
         </p:nvSpPr>
@@ -17315,7 +17295,7 @@
                 <a:ea typeface="Poppins" pitchFamily="34" charset="-122"/>
                 <a:cs typeface="Poppins" pitchFamily="34" charset="-120"/>
               </a:rPr>
-              <a:t>42,859</a:t>
+              <a:t>23,286</a:t>
             </a:r>
             <a:endParaRPr lang="en-US" sz="680" dirty="0"/>
           </a:p>
@@ -17323,7 +17303,7 @@
       </p:sp>
       <p:sp>
         <p:nvSpPr>
-          <p:cNvPr id="111" name="Shape 109"/>
+          <p:cNvPr id="110" name="Shape 108"/>
           <p:cNvSpPr/>
           <p:nvPr/>
         </p:nvSpPr>
@@ -17336,14 +17316,14 @@
             <a:avLst/>
           </a:prstGeom>
           <a:solidFill>
-            <a:srgbClr val="D4E9ED"/>
-          </a:solidFill>
-          <a:ln/>
-        </p:spPr>
-      </p:sp>
-      <p:sp>
-        <p:nvSpPr>
-          <p:cNvPr id="112" name="Text 110"/>
+            <a:srgbClr val="EDF5F7"/>
+          </a:solidFill>
+          <a:ln/>
+        </p:spPr>
+      </p:sp>
+      <p:sp>
+        <p:nvSpPr>
+          <p:cNvPr id="111" name="Text 109"/>
           <p:cNvSpPr txBox="1"/>
           <p:nvPr/>
         </p:nvSpPr>
@@ -17374,7 +17354,7 @@
                 <a:ea typeface="Poppins" pitchFamily="34" charset="-122"/>
                 <a:cs typeface="Poppins" pitchFamily="34" charset="-120"/>
               </a:rPr>
-              <a:t>23,286</a:t>
+              <a:t>1,642</a:t>
             </a:r>
             <a:endParaRPr lang="en-US" sz="680" dirty="0"/>
           </a:p>
@@ -17382,7 +17362,7 @@
       </p:sp>
       <p:sp>
         <p:nvSpPr>
-          <p:cNvPr id="113" name="Text 111"/>
+          <p:cNvPr id="112" name="Text 110"/>
           <p:cNvSpPr txBox="1"/>
           <p:nvPr/>
         </p:nvSpPr>
@@ -17413,7 +17393,7 @@
                 <a:ea typeface="Poppins" pitchFamily="34" charset="-122"/>
                 <a:cs typeface="Poppins" pitchFamily="34" charset="-120"/>
               </a:rPr>
-              <a:t>66,145</a:t>
+              <a:t>67,787</a:t>
             </a:r>
             <a:endParaRPr lang="en-US" sz="700" dirty="0"/>
           </a:p>
@@ -17421,7 +17401,7 @@
       </p:sp>
       <p:sp>
         <p:nvSpPr>
-          <p:cNvPr id="114" name="Text 112"/>
+          <p:cNvPr id="113" name="Text 111"/>
           <p:cNvSpPr txBox="1"/>
           <p:nvPr/>
         </p:nvSpPr>
@@ -17460,7 +17440,7 @@
       </p:sp>
       <p:sp>
         <p:nvSpPr>
-          <p:cNvPr id="115" name="Shape 113"/>
+          <p:cNvPr id="114" name="Shape 112"/>
           <p:cNvSpPr/>
           <p:nvPr/>
         </p:nvSpPr>
@@ -17480,7 +17460,7 @@
       </p:sp>
       <p:sp>
         <p:nvSpPr>
-          <p:cNvPr id="116" name="Text 114"/>
+          <p:cNvPr id="115" name="Text 113"/>
           <p:cNvSpPr txBox="1"/>
           <p:nvPr/>
         </p:nvSpPr>
@@ -17511,7 +17491,7 @@
                 <a:ea typeface="Poppins" pitchFamily="34" charset="-122"/>
                 <a:cs typeface="Poppins" pitchFamily="34" charset="-120"/>
               </a:rPr>
-              <a:t>7,046</a:t>
+              <a:t>6,582</a:t>
             </a:r>
             <a:endParaRPr lang="en-US" sz="680" dirty="0"/>
           </a:p>
@@ -17519,7 +17499,7 @@
       </p:sp>
       <p:sp>
         <p:nvSpPr>
-          <p:cNvPr id="117" name="Shape 115"/>
+          <p:cNvPr id="116" name="Shape 114"/>
           <p:cNvSpPr/>
           <p:nvPr/>
         </p:nvSpPr>
@@ -17532,14 +17512,14 @@
             <a:avLst/>
           </a:prstGeom>
           <a:solidFill>
-            <a:srgbClr val="EDF5F7"/>
-          </a:solidFill>
-          <a:ln/>
-        </p:spPr>
-      </p:sp>
-      <p:sp>
-        <p:nvSpPr>
-          <p:cNvPr id="118" name="Text 116"/>
+            <a:srgbClr val="D4E9ED"/>
+          </a:solidFill>
+          <a:ln/>
+        </p:spPr>
+      </p:sp>
+      <p:sp>
+        <p:nvSpPr>
+          <p:cNvPr id="117" name="Text 115"/>
           <p:cNvSpPr txBox="1"/>
           <p:nvPr/>
         </p:nvSpPr>
@@ -17570,7 +17550,7 @@
                 <a:ea typeface="Poppins" pitchFamily="34" charset="-122"/>
                 <a:cs typeface="Poppins" pitchFamily="34" charset="-120"/>
               </a:rPr>
-              <a:t>6,582</a:t>
+              <a:t>23,266</a:t>
             </a:r>
             <a:endParaRPr lang="en-US" sz="680" dirty="0"/>
           </a:p>
@@ -17578,7 +17558,7 @@
       </p:sp>
       <p:sp>
         <p:nvSpPr>
-          <p:cNvPr id="119" name="Shape 117"/>
+          <p:cNvPr id="118" name="Shape 116"/>
           <p:cNvSpPr/>
           <p:nvPr/>
         </p:nvSpPr>
@@ -17591,14 +17571,14 @@
             <a:avLst/>
           </a:prstGeom>
           <a:solidFill>
-            <a:srgbClr val="D4E9ED"/>
-          </a:solidFill>
-          <a:ln/>
-        </p:spPr>
-      </p:sp>
-      <p:sp>
-        <p:nvSpPr>
-          <p:cNvPr id="120" name="Text 118"/>
+            <a:srgbClr val="EDF5F7"/>
+          </a:solidFill>
+          <a:ln/>
+        </p:spPr>
+      </p:sp>
+      <p:sp>
+        <p:nvSpPr>
+          <p:cNvPr id="119" name="Text 117"/>
           <p:cNvSpPr txBox="1"/>
           <p:nvPr/>
         </p:nvSpPr>
@@ -17629,7 +17609,7 @@
                 <a:ea typeface="Poppins" pitchFamily="34" charset="-122"/>
                 <a:cs typeface="Poppins" pitchFamily="34" charset="-120"/>
               </a:rPr>
-              <a:t>23,266</a:t>
+              <a:t>4,322</a:t>
             </a:r>
             <a:endParaRPr lang="en-US" sz="680" dirty="0"/>
           </a:p>
@@ -17637,7 +17617,7 @@
       </p:sp>
       <p:sp>
         <p:nvSpPr>
-          <p:cNvPr id="121" name="Shape 119"/>
+          <p:cNvPr id="120" name="Shape 118"/>
           <p:cNvSpPr/>
           <p:nvPr/>
         </p:nvSpPr>
@@ -17657,7 +17637,7 @@
       </p:sp>
       <p:sp>
         <p:nvSpPr>
-          <p:cNvPr id="122" name="Text 120"/>
+          <p:cNvPr id="121" name="Text 119"/>
           <p:cNvSpPr txBox="1"/>
           <p:nvPr/>
         </p:nvSpPr>
@@ -17688,7 +17668,7 @@
                 <a:ea typeface="Poppins" pitchFamily="34" charset="-122"/>
                 <a:cs typeface="Poppins" pitchFamily="34" charset="-120"/>
               </a:rPr>
-              <a:t>4,322</a:t>
+              <a:t>1,015</a:t>
             </a:r>
             <a:endParaRPr lang="en-US" sz="680" dirty="0"/>
           </a:p>
@@ -17696,7 +17676,7 @@
       </p:sp>
       <p:sp>
         <p:nvSpPr>
-          <p:cNvPr id="123" name="Text 121"/>
+          <p:cNvPr id="122" name="Text 120"/>
           <p:cNvSpPr txBox="1"/>
           <p:nvPr/>
         </p:nvSpPr>
@@ -17727,7 +17707,7 @@
                 <a:ea typeface="Poppins" pitchFamily="34" charset="-122"/>
                 <a:cs typeface="Poppins" pitchFamily="34" charset="-120"/>
               </a:rPr>
-              <a:t>41,216</a:t>
+              <a:t>35,185</a:t>
             </a:r>
             <a:endParaRPr lang="en-US" sz="700" dirty="0"/>
           </a:p>
@@ -17735,7 +17715,7 @@
       </p:sp>
       <p:sp>
         <p:nvSpPr>
-          <p:cNvPr id="124" name="Text 122"/>
+          <p:cNvPr id="123" name="Text 121"/>
           <p:cNvSpPr txBox="1"/>
           <p:nvPr/>
         </p:nvSpPr>
@@ -17774,7 +17754,7 @@
       </p:sp>
       <p:sp>
         <p:nvSpPr>
-          <p:cNvPr id="125" name="Shape 123"/>
+          <p:cNvPr id="124" name="Shape 122"/>
           <p:cNvSpPr/>
           <p:nvPr/>
         </p:nvSpPr>
@@ -17794,7 +17774,7 @@
       </p:sp>
       <p:sp>
         <p:nvSpPr>
-          <p:cNvPr id="126" name="Text 124"/>
+          <p:cNvPr id="125" name="Text 123"/>
           <p:cNvSpPr txBox="1"/>
           <p:nvPr/>
         </p:nvSpPr>
@@ -17825,7 +17805,7 @@
                 <a:ea typeface="Poppins" pitchFamily="34" charset="-122"/>
                 <a:cs typeface="Poppins" pitchFamily="34" charset="-120"/>
               </a:rPr>
-              <a:t>885</a:t>
+              <a:t>6,208</a:t>
             </a:r>
             <a:endParaRPr lang="en-US" sz="680" dirty="0"/>
           </a:p>
@@ -17833,7 +17813,7 @@
       </p:sp>
       <p:sp>
         <p:nvSpPr>
-          <p:cNvPr id="127" name="Shape 125"/>
+          <p:cNvPr id="126" name="Shape 124"/>
           <p:cNvSpPr/>
           <p:nvPr/>
         </p:nvSpPr>
@@ -17853,7 +17833,7 @@
       </p:sp>
       <p:sp>
         <p:nvSpPr>
-          <p:cNvPr id="128" name="Text 126"/>
+          <p:cNvPr id="127" name="Text 125"/>
           <p:cNvSpPr txBox="1"/>
           <p:nvPr/>
         </p:nvSpPr>
@@ -17884,7 +17864,7 @@
                 <a:ea typeface="Poppins" pitchFamily="34" charset="-122"/>
                 <a:cs typeface="Poppins" pitchFamily="34" charset="-120"/>
               </a:rPr>
-              <a:t>6,208</a:t>
+              <a:t>10,369</a:t>
             </a:r>
             <a:endParaRPr lang="en-US" sz="680" dirty="0"/>
           </a:p>
@@ -17892,7 +17872,7 @@
       </p:sp>
       <p:sp>
         <p:nvSpPr>
-          <p:cNvPr id="129" name="Shape 127"/>
+          <p:cNvPr id="128" name="Shape 126"/>
           <p:cNvSpPr/>
           <p:nvPr/>
         </p:nvSpPr>
@@ -17912,7 +17892,7 @@
       </p:sp>
       <p:sp>
         <p:nvSpPr>
-          <p:cNvPr id="130" name="Text 128"/>
+          <p:cNvPr id="129" name="Text 127"/>
           <p:cNvSpPr txBox="1"/>
           <p:nvPr/>
         </p:nvSpPr>
@@ -17943,7 +17923,7 @@
                 <a:ea typeface="Poppins" pitchFamily="34" charset="-122"/>
                 <a:cs typeface="Poppins" pitchFamily="34" charset="-120"/>
               </a:rPr>
-              <a:t>10,369</a:t>
+              <a:t>11,891</a:t>
             </a:r>
             <a:endParaRPr lang="en-US" sz="680" dirty="0"/>
           </a:p>
@@ -17951,7 +17931,7 @@
       </p:sp>
       <p:sp>
         <p:nvSpPr>
-          <p:cNvPr id="131" name="Shape 129"/>
+          <p:cNvPr id="130" name="Shape 128"/>
           <p:cNvSpPr/>
           <p:nvPr/>
         </p:nvSpPr>
@@ -17971,7 +17951,7 @@
       </p:sp>
       <p:sp>
         <p:nvSpPr>
-          <p:cNvPr id="132" name="Text 130"/>
+          <p:cNvPr id="131" name="Text 129"/>
           <p:cNvSpPr txBox="1"/>
           <p:nvPr/>
         </p:nvSpPr>
@@ -18002,7 +17982,7 @@
                 <a:ea typeface="Poppins" pitchFamily="34" charset="-122"/>
                 <a:cs typeface="Poppins" pitchFamily="34" charset="-120"/>
               </a:rPr>
-              <a:t>11,891</a:t>
+              <a:t>328</a:t>
             </a:r>
             <a:endParaRPr lang="en-US" sz="680" dirty="0"/>
           </a:p>
@@ -18010,7 +17990,7 @@
       </p:sp>
       <p:sp>
         <p:nvSpPr>
-          <p:cNvPr id="133" name="Text 131"/>
+          <p:cNvPr id="132" name="Text 130"/>
           <p:cNvSpPr txBox="1"/>
           <p:nvPr/>
         </p:nvSpPr>
@@ -18041,7 +18021,7 @@
                 <a:ea typeface="Poppins" pitchFamily="34" charset="-122"/>
                 <a:cs typeface="Poppins" pitchFamily="34" charset="-120"/>
               </a:rPr>
-              <a:t>29,353</a:t>
+              <a:t>28,796</a:t>
             </a:r>
             <a:endParaRPr lang="en-US" sz="700" dirty="0"/>
           </a:p>
@@ -18049,7 +18029,7 @@
       </p:sp>
       <p:sp>
         <p:nvSpPr>
-          <p:cNvPr id="134" name="Text 132"/>
+          <p:cNvPr id="133" name="Text 131"/>
           <p:cNvSpPr txBox="1"/>
           <p:nvPr/>
         </p:nvSpPr>
@@ -18088,7 +18068,7 @@
       </p:sp>
       <p:sp>
         <p:nvSpPr>
-          <p:cNvPr id="135" name="Shape 133"/>
+          <p:cNvPr id="134" name="Shape 132"/>
           <p:cNvSpPr/>
           <p:nvPr/>
         </p:nvSpPr>
@@ -18108,7 +18088,7 @@
       </p:sp>
       <p:sp>
         <p:nvSpPr>
-          <p:cNvPr id="136" name="Text 134"/>
+          <p:cNvPr id="135" name="Text 133"/>
           <p:cNvSpPr txBox="1"/>
           <p:nvPr/>
         </p:nvSpPr>
@@ -18139,7 +18119,7 @@
                 <a:ea typeface="Poppins" pitchFamily="34" charset="-122"/>
                 <a:cs typeface="Poppins" pitchFamily="34" charset="-120"/>
               </a:rPr>
-              <a:t>1,666</a:t>
+              <a:t>2,970</a:t>
             </a:r>
             <a:endParaRPr lang="en-US" sz="680" dirty="0"/>
           </a:p>
@@ -18147,7 +18127,7 @@
       </p:sp>
       <p:sp>
         <p:nvSpPr>
-          <p:cNvPr id="137" name="Shape 135"/>
+          <p:cNvPr id="136" name="Shape 134"/>
           <p:cNvSpPr/>
           <p:nvPr/>
         </p:nvSpPr>
@@ -18167,7 +18147,7 @@
       </p:sp>
       <p:sp>
         <p:nvSpPr>
-          <p:cNvPr id="138" name="Text 136"/>
+          <p:cNvPr id="137" name="Text 135"/>
           <p:cNvSpPr txBox="1"/>
           <p:nvPr/>
         </p:nvSpPr>
@@ -18198,7 +18178,7 @@
                 <a:ea typeface="Poppins" pitchFamily="34" charset="-122"/>
                 <a:cs typeface="Poppins" pitchFamily="34" charset="-120"/>
               </a:rPr>
-              <a:t>2,970</a:t>
+              <a:t>7,237</a:t>
             </a:r>
             <a:endParaRPr lang="en-US" sz="680" dirty="0"/>
           </a:p>
@@ -18206,7 +18186,7 @@
       </p:sp>
       <p:sp>
         <p:nvSpPr>
-          <p:cNvPr id="139" name="Shape 137"/>
+          <p:cNvPr id="138" name="Shape 136"/>
           <p:cNvSpPr/>
           <p:nvPr/>
         </p:nvSpPr>
@@ -18226,7 +18206,7 @@
       </p:sp>
       <p:sp>
         <p:nvSpPr>
-          <p:cNvPr id="140" name="Text 138"/>
+          <p:cNvPr id="139" name="Text 137"/>
           <p:cNvSpPr txBox="1"/>
           <p:nvPr/>
         </p:nvSpPr>
@@ -18257,7 +18237,7 @@
                 <a:ea typeface="Poppins" pitchFamily="34" charset="-122"/>
                 <a:cs typeface="Poppins" pitchFamily="34" charset="-120"/>
               </a:rPr>
-              <a:t>7,237</a:t>
+              <a:t>19,289</a:t>
             </a:r>
             <a:endParaRPr lang="en-US" sz="680" dirty="0"/>
           </a:p>
@@ -18265,7 +18245,7 @@
       </p:sp>
       <p:sp>
         <p:nvSpPr>
-          <p:cNvPr id="141" name="Shape 139"/>
+          <p:cNvPr id="140" name="Shape 138"/>
           <p:cNvSpPr/>
           <p:nvPr/>
         </p:nvSpPr>
@@ -18285,7 +18265,7 @@
       </p:sp>
       <p:sp>
         <p:nvSpPr>
-          <p:cNvPr id="142" name="Text 140"/>
+          <p:cNvPr id="141" name="Text 139"/>
           <p:cNvSpPr txBox="1"/>
           <p:nvPr/>
         </p:nvSpPr>
@@ -18316,7 +18296,7 @@
                 <a:ea typeface="Poppins" pitchFamily="34" charset="-122"/>
                 <a:cs typeface="Poppins" pitchFamily="34" charset="-120"/>
               </a:rPr>
-              <a:t>19,289</a:t>
+              <a:t>1,249</a:t>
             </a:r>
             <a:endParaRPr lang="en-US" sz="680" dirty="0"/>
           </a:p>
@@ -18324,7 +18304,7 @@
       </p:sp>
       <p:sp>
         <p:nvSpPr>
-          <p:cNvPr id="143" name="Text 141"/>
+          <p:cNvPr id="142" name="Text 140"/>
           <p:cNvSpPr txBox="1"/>
           <p:nvPr/>
         </p:nvSpPr>
@@ -18355,7 +18335,7 @@
                 <a:ea typeface="Poppins" pitchFamily="34" charset="-122"/>
                 <a:cs typeface="Poppins" pitchFamily="34" charset="-120"/>
               </a:rPr>
-              <a:t>31,162</a:t>
+              <a:t>30,745</a:t>
             </a:r>
             <a:endParaRPr lang="en-US" sz="700" dirty="0"/>
           </a:p>
@@ -18363,7 +18343,7 @@
       </p:sp>
       <p:sp>
         <p:nvSpPr>
-          <p:cNvPr id="144" name="Shape 142"/>
+          <p:cNvPr id="143" name="Shape 141"/>
           <p:cNvSpPr/>
           <p:nvPr/>
         </p:nvSpPr>
@@ -18383,7 +18363,7 @@
       </p:sp>
       <p:sp>
         <p:nvSpPr>
-          <p:cNvPr id="145" name="Text 143"/>
+          <p:cNvPr id="144" name="Text 142"/>
           <p:cNvSpPr txBox="1"/>
           <p:nvPr/>
         </p:nvSpPr>
@@ -18422,7 +18402,7 @@
       </p:sp>
       <p:sp>
         <p:nvSpPr>
-          <p:cNvPr id="146" name="Text 144"/>
+          <p:cNvPr id="145" name="Text 143"/>
           <p:cNvSpPr txBox="1"/>
           <p:nvPr/>
         </p:nvSpPr>
@@ -18453,7 +18433,7 @@
                 <a:ea typeface="Poppins" pitchFamily="34" charset="-122"/>
                 <a:cs typeface="Poppins" pitchFamily="34" charset="-120"/>
               </a:rPr>
-              <a:t>120,224</a:t>
+              <a:t>228,132</a:t>
             </a:r>
             <a:endParaRPr lang="en-US" sz="750" dirty="0"/>
           </a:p>
@@ -18461,7 +18441,7 @@
       </p:sp>
       <p:sp>
         <p:nvSpPr>
-          <p:cNvPr id="147" name="Text 145"/>
+          <p:cNvPr id="146" name="Text 144"/>
           <p:cNvSpPr txBox="1"/>
           <p:nvPr/>
         </p:nvSpPr>
@@ -18492,7 +18472,7 @@
                 <a:ea typeface="Poppins" pitchFamily="34" charset="-122"/>
                 <a:cs typeface="Poppins" pitchFamily="34" charset="-120"/>
               </a:rPr>
-              <a:t>228,132</a:t>
+              <a:t>293,419</a:t>
             </a:r>
             <a:endParaRPr lang="en-US" sz="750" dirty="0"/>
           </a:p>
@@ -18500,7 +18480,7 @@
       </p:sp>
       <p:sp>
         <p:nvSpPr>
-          <p:cNvPr id="148" name="Text 146"/>
+          <p:cNvPr id="147" name="Text 145"/>
           <p:cNvSpPr txBox="1"/>
           <p:nvPr/>
         </p:nvSpPr>
@@ -18531,7 +18511,7 @@
                 <a:ea typeface="Poppins" pitchFamily="34" charset="-122"/>
                 <a:cs typeface="Poppins" pitchFamily="34" charset="-120"/>
               </a:rPr>
-              <a:t>293,419</a:t>
+              <a:t>277,261</a:t>
             </a:r>
             <a:endParaRPr lang="en-US" sz="750" dirty="0"/>
           </a:p>
@@ -18539,7 +18519,7 @@
       </p:sp>
       <p:sp>
         <p:nvSpPr>
-          <p:cNvPr id="149" name="Text 147"/>
+          <p:cNvPr id="148" name="Text 146"/>
           <p:cNvSpPr txBox="1"/>
           <p:nvPr/>
         </p:nvSpPr>
@@ -18570,7 +18550,7 @@
                 <a:ea typeface="Poppins" pitchFamily="34" charset="-122"/>
                 <a:cs typeface="Poppins" pitchFamily="34" charset="-120"/>
               </a:rPr>
-              <a:t>277,261</a:t>
+              <a:t>50,453</a:t>
             </a:r>
             <a:endParaRPr lang="en-US" sz="750" dirty="0"/>
           </a:p>
@@ -18578,7 +18558,7 @@
       </p:sp>
       <p:sp>
         <p:nvSpPr>
-          <p:cNvPr id="150" name="Text 148"/>
+          <p:cNvPr id="149" name="Text 147"/>
           <p:cNvSpPr txBox="1"/>
           <p:nvPr/>
         </p:nvSpPr>
@@ -18609,7 +18589,7 @@
                 <a:ea typeface="Poppins" pitchFamily="34" charset="-122"/>
                 <a:cs typeface="Poppins" pitchFamily="34" charset="-120"/>
               </a:rPr>
-              <a:t>919,036</a:t>
+              <a:t>849,265</a:t>
             </a:r>
             <a:endParaRPr lang="en-US" sz="750" dirty="0"/>
           </a:p>
@@ -18617,7 +18597,7 @@
       </p:sp>
       <p:sp>
         <p:nvSpPr>
-          <p:cNvPr id="151" name="Text 149"/>
+          <p:cNvPr id="150" name="Text 148"/>
           <p:cNvSpPr txBox="1"/>
           <p:nvPr/>
         </p:nvSpPr>
@@ -18670,7 +18650,7 @@
       </p:sp>
       <p:sp>
         <p:nvSpPr>
-          <p:cNvPr id="152" name="Shape 150"/>
+          <p:cNvPr id="151" name="Shape 149"/>
           <p:cNvSpPr/>
           <p:nvPr/>
         </p:nvSpPr>
@@ -18690,7 +18670,7 @@
       </p:sp>
       <p:sp>
         <p:nvSpPr>
-          <p:cNvPr id="153" name="Text 151"/>
+          <p:cNvPr id="152" name="Text 150"/>
           <p:cNvSpPr txBox="1"/>
           <p:nvPr/>
         </p:nvSpPr>
@@ -18729,7 +18709,7 @@
       </p:sp>
       <p:sp>
         <p:nvSpPr>
-          <p:cNvPr id="154" name="Text 152"/>
+          <p:cNvPr id="153" name="Text 151"/>
           <p:cNvSpPr txBox="1"/>
           <p:nvPr/>
         </p:nvSpPr>
@@ -18768,7 +18748,7 @@
       </p:sp>
       <p:sp>
         <p:nvSpPr>
-          <p:cNvPr id="155" name="Shape 153"/>
+          <p:cNvPr id="154" name="Shape 152"/>
           <p:cNvSpPr/>
           <p:nvPr/>
         </p:nvSpPr>
@@ -18788,7 +18768,7 @@
       </p:sp>
       <p:sp>
         <p:nvSpPr>
-          <p:cNvPr id="156" name="Text 154"/>
+          <p:cNvPr id="155" name="Text 153"/>
           <p:cNvSpPr txBox="1"/>
           <p:nvPr/>
         </p:nvSpPr>
@@ -18827,7 +18807,7 @@
       </p:sp>
       <p:sp>
         <p:nvSpPr>
-          <p:cNvPr id="157" name="Text 155"/>
+          <p:cNvPr id="156" name="Text 154"/>
           <p:cNvSpPr txBox="1"/>
           <p:nvPr/>
         </p:nvSpPr>
@@ -18866,7 +18846,7 @@
       </p:sp>
       <p:sp>
         <p:nvSpPr>
-          <p:cNvPr id="158" name="Shape 156"/>
+          <p:cNvPr id="157" name="Shape 155"/>
           <p:cNvSpPr/>
           <p:nvPr/>
         </p:nvSpPr>
@@ -18886,7 +18866,7 @@
       </p:sp>
       <p:sp>
         <p:nvSpPr>
-          <p:cNvPr id="159" name="Text 157"/>
+          <p:cNvPr id="158" name="Text 156"/>
           <p:cNvSpPr txBox="1"/>
           <p:nvPr/>
         </p:nvSpPr>
@@ -18925,7 +18905,7 @@
       </p:sp>
       <p:sp>
         <p:nvSpPr>
-          <p:cNvPr id="160" name="Text 158"/>
+          <p:cNvPr id="159" name="Text 157"/>
           <p:cNvSpPr txBox="1"/>
           <p:nvPr/>
         </p:nvSpPr>
@@ -18964,7 +18944,7 @@
       </p:sp>
       <p:sp>
         <p:nvSpPr>
-          <p:cNvPr id="161" name="Shape 159"/>
+          <p:cNvPr id="160" name="Shape 158"/>
           <p:cNvSpPr/>
           <p:nvPr/>
         </p:nvSpPr>
@@ -18984,7 +18964,7 @@
       </p:sp>
       <p:sp>
         <p:nvSpPr>
-          <p:cNvPr id="162" name="Text 160"/>
+          <p:cNvPr id="161" name="Text 159"/>
           <p:cNvSpPr txBox="1"/>
           <p:nvPr/>
         </p:nvSpPr>
@@ -19023,7 +19003,7 @@
       </p:sp>
       <p:sp>
         <p:nvSpPr>
-          <p:cNvPr id="163" name="Text 161"/>
+          <p:cNvPr id="162" name="Text 160"/>
           <p:cNvSpPr txBox="1"/>
           <p:nvPr/>
         </p:nvSpPr>
@@ -19062,7 +19042,7 @@
       </p:sp>
       <p:sp>
         <p:nvSpPr>
-          <p:cNvPr id="164" name="Shape 162"/>
+          <p:cNvPr id="163" name="Shape 161"/>
           <p:cNvSpPr/>
           <p:nvPr/>
         </p:nvSpPr>
@@ -19082,7 +19062,7 @@
       </p:sp>
       <p:sp>
         <p:nvSpPr>
-          <p:cNvPr id="165" name="Text 163"/>
+          <p:cNvPr id="164" name="Text 162"/>
           <p:cNvSpPr txBox="1"/>
           <p:nvPr/>
         </p:nvSpPr>
@@ -19121,7 +19101,7 @@
       </p:sp>
       <p:sp>
         <p:nvSpPr>
-          <p:cNvPr id="166" name="Text 164"/>
+          <p:cNvPr id="165" name="Text 163"/>
           <p:cNvSpPr txBox="1"/>
           <p:nvPr/>
         </p:nvSpPr>
@@ -19160,7 +19140,7 @@
       </p:sp>
       <p:sp>
         <p:nvSpPr>
-          <p:cNvPr id="167" name="Shape 165"/>
+          <p:cNvPr id="166" name="Shape 164"/>
           <p:cNvSpPr/>
           <p:nvPr/>
         </p:nvSpPr>
@@ -19180,7 +19160,7 @@
       </p:sp>
       <p:sp>
         <p:nvSpPr>
-          <p:cNvPr id="168" name="Text 166"/>
+          <p:cNvPr id="167" name="Text 165"/>
           <p:cNvSpPr txBox="1"/>
           <p:nvPr/>
         </p:nvSpPr>
@@ -19219,7 +19199,7 @@
       </p:sp>
       <p:sp>
         <p:nvSpPr>
-          <p:cNvPr id="169" name="Text 167"/>
+          <p:cNvPr id="168" name="Text 166"/>
           <p:cNvSpPr txBox="1"/>
           <p:nvPr/>
         </p:nvSpPr>
@@ -19258,7 +19238,7 @@
       </p:sp>
       <p:sp>
         <p:nvSpPr>
-          <p:cNvPr id="170" name="Shape 168"/>
+          <p:cNvPr id="169" name="Shape 167"/>
           <p:cNvSpPr/>
           <p:nvPr/>
         </p:nvSpPr>
@@ -19278,7 +19258,7 @@
       </p:sp>
       <p:sp>
         <p:nvSpPr>
-          <p:cNvPr id="171" name="Text 169"/>
+          <p:cNvPr id="170" name="Text 168"/>
           <p:cNvSpPr txBox="1"/>
           <p:nvPr/>
         </p:nvSpPr>
@@ -19317,7 +19297,7 @@
       </p:sp>
       <p:sp>
         <p:nvSpPr>
-          <p:cNvPr id="172" name="Text 170"/>
+          <p:cNvPr id="171" name="Text 169"/>
           <p:cNvSpPr txBox="1"/>
           <p:nvPr/>
         </p:nvSpPr>
@@ -19356,7 +19336,7 @@
       </p:sp>
       <p:sp>
         <p:nvSpPr>
-          <p:cNvPr id="173" name="Shape 171"/>
+          <p:cNvPr id="172" name="Shape 170"/>
           <p:cNvSpPr/>
           <p:nvPr/>
         </p:nvSpPr>
@@ -19376,7 +19356,7 @@
       </p:sp>
       <p:sp>
         <p:nvSpPr>
-          <p:cNvPr id="174" name="Text 172"/>
+          <p:cNvPr id="173" name="Text 171"/>
           <p:cNvSpPr txBox="1"/>
           <p:nvPr/>
         </p:nvSpPr>
@@ -19415,7 +19395,7 @@
       </p:sp>
       <p:sp>
         <p:nvSpPr>
-          <p:cNvPr id="175" name="Text 173"/>
+          <p:cNvPr id="174" name="Text 172"/>
           <p:cNvSpPr txBox="1"/>
           <p:nvPr/>
         </p:nvSpPr>
@@ -19454,7 +19434,7 @@
       </p:sp>
       <p:sp>
         <p:nvSpPr>
-          <p:cNvPr id="176" name="Shape 174"/>
+          <p:cNvPr id="175" name="Shape 173"/>
           <p:cNvSpPr/>
           <p:nvPr/>
         </p:nvSpPr>
@@ -19474,7 +19454,7 @@
       </p:sp>
       <p:sp>
         <p:nvSpPr>
-          <p:cNvPr id="177" name="Text 175"/>
+          <p:cNvPr id="176" name="Text 174"/>
           <p:cNvSpPr txBox="1"/>
           <p:nvPr/>
         </p:nvSpPr>
@@ -19513,7 +19493,7 @@
       </p:sp>
       <p:sp>
         <p:nvSpPr>
-          <p:cNvPr id="178" name="Text 176"/>
+          <p:cNvPr id="177" name="Text 175"/>
           <p:cNvSpPr txBox="1"/>
           <p:nvPr/>
         </p:nvSpPr>
@@ -19552,7 +19532,7 @@
       </p:sp>
       <p:sp>
         <p:nvSpPr>
-          <p:cNvPr id="179" name="Shape 177"/>
+          <p:cNvPr id="178" name="Shape 176"/>
           <p:cNvSpPr/>
           <p:nvPr/>
         </p:nvSpPr>
@@ -19572,7 +19552,7 @@
       </p:sp>
       <p:sp>
         <p:nvSpPr>
-          <p:cNvPr id="180" name="Text 178"/>
+          <p:cNvPr id="179" name="Text 177"/>
           <p:cNvSpPr txBox="1"/>
           <p:nvPr/>
         </p:nvSpPr>
@@ -19611,7 +19591,7 @@
       </p:sp>
       <p:sp>
         <p:nvSpPr>
-          <p:cNvPr id="181" name="Text 179"/>
+          <p:cNvPr id="180" name="Text 178"/>
           <p:cNvSpPr txBox="1"/>
           <p:nvPr/>
         </p:nvSpPr>
@@ -19650,7 +19630,7 @@
       </p:sp>
       <p:sp>
         <p:nvSpPr>
-          <p:cNvPr id="182" name="Shape 180"/>
+          <p:cNvPr id="181" name="Shape 179"/>
           <p:cNvSpPr/>
           <p:nvPr/>
         </p:nvSpPr>
@@ -19670,7 +19650,7 @@
       </p:sp>
       <p:sp>
         <p:nvSpPr>
-          <p:cNvPr id="183" name="Text 181"/>
+          <p:cNvPr id="182" name="Text 180"/>
           <p:cNvSpPr txBox="1"/>
           <p:nvPr/>
         </p:nvSpPr>
@@ -19709,7 +19689,7 @@
       </p:sp>
       <p:sp>
         <p:nvSpPr>
-          <p:cNvPr id="184" name="Text 182"/>
+          <p:cNvPr id="183" name="Text 181"/>
           <p:cNvSpPr txBox="1"/>
           <p:nvPr/>
         </p:nvSpPr>
@@ -19748,7 +19728,7 @@
       </p:sp>
       <p:sp>
         <p:nvSpPr>
-          <p:cNvPr id="185" name="Shape 183"/>
+          <p:cNvPr id="184" name="Shape 182"/>
           <p:cNvSpPr/>
           <p:nvPr/>
         </p:nvSpPr>
@@ -19768,7 +19748,7 @@
       </p:sp>
       <p:sp>
         <p:nvSpPr>
-          <p:cNvPr id="186" name="Text 184"/>
+          <p:cNvPr id="185" name="Text 183"/>
           <p:cNvSpPr txBox="1"/>
           <p:nvPr/>
         </p:nvSpPr>
@@ -19807,7 +19787,7 @@
       </p:sp>
       <p:sp>
         <p:nvSpPr>
-          <p:cNvPr id="187" name="Text 185"/>
+          <p:cNvPr id="186" name="Text 184"/>
           <p:cNvSpPr txBox="1"/>
           <p:nvPr/>
         </p:nvSpPr>
@@ -19846,7 +19826,7 @@
       </p:sp>
       <p:sp>
         <p:nvSpPr>
-          <p:cNvPr id="188" name="Shape 186"/>
+          <p:cNvPr id="187" name="Shape 185"/>
           <p:cNvSpPr/>
           <p:nvPr/>
         </p:nvSpPr>
@@ -19866,7 +19846,7 @@
       </p:sp>
       <p:sp>
         <p:nvSpPr>
-          <p:cNvPr id="189" name="Text 187"/>
+          <p:cNvPr id="188" name="Text 186"/>
           <p:cNvSpPr txBox="1"/>
           <p:nvPr/>
         </p:nvSpPr>
@@ -19905,7 +19885,7 @@
       </p:sp>
       <p:sp>
         <p:nvSpPr>
-          <p:cNvPr id="190" name="Text 188"/>
+          <p:cNvPr id="189" name="Text 187"/>
           <p:cNvSpPr txBox="1"/>
           <p:nvPr/>
         </p:nvSpPr>
@@ -19944,7 +19924,7 @@
       </p:sp>
       <p:sp>
         <p:nvSpPr>
-          <p:cNvPr id="191" name="Shape 189"/>
+          <p:cNvPr id="190" name="Shape 188"/>
           <p:cNvSpPr/>
           <p:nvPr/>
         </p:nvSpPr>
@@ -19964,7 +19944,7 @@
       </p:sp>
       <p:sp>
         <p:nvSpPr>
-          <p:cNvPr id="192" name="Text 190"/>
+          <p:cNvPr id="191" name="Text 189"/>
           <p:cNvSpPr txBox="1"/>
           <p:nvPr/>
         </p:nvSpPr>
@@ -20003,7 +19983,7 @@
       </p:sp>
       <p:sp>
         <p:nvSpPr>
-          <p:cNvPr id="193" name="Text 191"/>
+          <p:cNvPr id="192" name="Text 190"/>
           <p:cNvSpPr txBox="1"/>
           <p:nvPr/>
         </p:nvSpPr>
@@ -20042,7 +20022,7 @@
       </p:sp>
       <p:sp>
         <p:nvSpPr>
-          <p:cNvPr id="194" name="Text 192"/>
+          <p:cNvPr id="193" name="Text 191"/>
           <p:cNvSpPr txBox="1"/>
           <p:nvPr/>
         </p:nvSpPr>
@@ -20081,7 +20061,7 @@
       </p:sp>
       <p:sp>
         <p:nvSpPr>
-          <p:cNvPr id="195" name="Shape 193"/>
+          <p:cNvPr id="194" name="Shape 192"/>
           <p:cNvSpPr/>
           <p:nvPr/>
         </p:nvSpPr>
@@ -20110,7 +20090,7 @@
       </p:sp>
       <p:sp>
         <p:nvSpPr>
-          <p:cNvPr id="196" name="Text 194"/>
+          <p:cNvPr id="195" name="Text 193"/>
           <p:cNvSpPr txBox="1"/>
           <p:nvPr/>
         </p:nvSpPr>
@@ -20149,7 +20129,7 @@
       </p:sp>
       <p:sp>
         <p:nvSpPr>
-          <p:cNvPr id="197" name="Text 195"/>
+          <p:cNvPr id="196" name="Text 194"/>
           <p:cNvSpPr txBox="1"/>
           <p:nvPr/>
         </p:nvSpPr>
@@ -20180,7 +20160,7 @@
                 <a:ea typeface="Poppins" pitchFamily="34" charset="-122"/>
                 <a:cs typeface="Poppins" pitchFamily="34" charset="-120"/>
               </a:rPr>
-              <a:t>~476</a:t>
+              <a:t>~770</a:t>
             </a:r>
             <a:endParaRPr lang="en-US" sz="3000" dirty="0"/>
           </a:p>
@@ -20188,7 +20168,7 @@
       </p:sp>
       <p:sp>
         <p:nvSpPr>
-          <p:cNvPr id="198" name="Text 196"/>
+          <p:cNvPr id="197" name="Text 195"/>
           <p:cNvSpPr txBox="1"/>
           <p:nvPr/>
         </p:nvSpPr>
@@ -20234,7 +20214,7 @@
                 <a:ea typeface="Poppins" pitchFamily="34" charset="-122"/>
                 <a:cs typeface="Poppins" pitchFamily="34" charset="-120"/>
               </a:rPr>
-              <a:t>~137 baseline</a:t>
+              <a:t>~476 baseline</a:t>
             </a:r>
             <a:endParaRPr lang="en-US" sz="750" dirty="0"/>
           </a:p>
@@ -20242,7 +20222,7 @@
       </p:sp>
       <p:sp>
         <p:nvSpPr>
-          <p:cNvPr id="199" name="Text 197"/>
+          <p:cNvPr id="198" name="Text 196"/>
           <p:cNvSpPr txBox="1"/>
           <p:nvPr/>
         </p:nvSpPr>
@@ -20281,7 +20261,7 @@
       </p:sp>
       <p:sp>
         <p:nvSpPr>
-          <p:cNvPr id="200" name="Text 198"/>
+          <p:cNvPr id="199" name="Text 197"/>
           <p:cNvSpPr txBox="1"/>
           <p:nvPr/>
         </p:nvSpPr>
@@ -20306,13 +20286,13 @@
             <a:r>
               <a:rPr lang="en-US" sz="680" b="1" dirty="0">
                 <a:solidFill>
-                  <a:srgbClr val="8FA1AC"/>
-                </a:solidFill>
-                <a:latin typeface="Poppins" pitchFamily="34" charset="0"/>
-                <a:ea typeface="Poppins" pitchFamily="34" charset="-122"/>
-                <a:cs typeface="Poppins" pitchFamily="34" charset="-120"/>
-              </a:rPr>
-              <a:t>new</a:t>
+                  <a:srgbClr val="3D8F5F"/>
+                </a:solidFill>
+                <a:latin typeface="Poppins" pitchFamily="34" charset="0"/>
+                <a:ea typeface="Poppins" pitchFamily="34" charset="-122"/>
+                <a:cs typeface="Poppins" pitchFamily="34" charset="-120"/>
+              </a:rPr>
+              <a:t>▲ +241</a:t>
             </a:r>
             <a:endParaRPr lang="en-US" sz="680" dirty="0"/>
           </a:p>
@@ -20320,7 +20300,7 @@
       </p:sp>
       <p:sp>
         <p:nvSpPr>
-          <p:cNvPr id="201" name="Text 199"/>
+          <p:cNvPr id="200" name="Text 198"/>
           <p:cNvSpPr txBox="1"/>
           <p:nvPr/>
         </p:nvSpPr>
@@ -20351,7 +20331,7 @@
                 <a:ea typeface="Poppins" pitchFamily="34" charset="-122"/>
                 <a:cs typeface="Poppins" pitchFamily="34" charset="-120"/>
               </a:rPr>
-              <a:t>~244/wk</a:t>
+              <a:t>~485/wk</a:t>
             </a:r>
             <a:endParaRPr lang="en-US" sz="750" dirty="0"/>
           </a:p>
@@ -20359,7 +20339,7 @@
       </p:sp>
       <p:sp>
         <p:nvSpPr>
-          <p:cNvPr id="202" name="Text 200"/>
+          <p:cNvPr id="201" name="Text 199"/>
           <p:cNvSpPr txBox="1"/>
           <p:nvPr/>
         </p:nvSpPr>
@@ -20398,7 +20378,7 @@
       </p:sp>
       <p:sp>
         <p:nvSpPr>
-          <p:cNvPr id="203" name="Text 201"/>
+          <p:cNvPr id="202" name="Text 200"/>
           <p:cNvSpPr txBox="1"/>
           <p:nvPr/>
         </p:nvSpPr>
@@ -20423,13 +20403,13 @@
             <a:r>
               <a:rPr lang="en-US" sz="680" b="1" dirty="0">
                 <a:solidFill>
-                  <a:srgbClr val="8FA1AC"/>
-                </a:solidFill>
-                <a:latin typeface="Poppins" pitchFamily="34" charset="0"/>
-                <a:ea typeface="Poppins" pitchFamily="34" charset="-122"/>
-                <a:cs typeface="Poppins" pitchFamily="34" charset="-120"/>
-              </a:rPr>
-              <a:t>new</a:t>
+                  <a:srgbClr val="3D8F5F"/>
+                </a:solidFill>
+                <a:latin typeface="Poppins" pitchFamily="34" charset="0"/>
+                <a:ea typeface="Poppins" pitchFamily="34" charset="-122"/>
+                <a:cs typeface="Poppins" pitchFamily="34" charset="-120"/>
+              </a:rPr>
+              <a:t>▲ +44</a:t>
             </a:r>
             <a:endParaRPr lang="en-US" sz="680" dirty="0"/>
           </a:p>
@@ -20437,7 +20417,7 @@
       </p:sp>
       <p:sp>
         <p:nvSpPr>
-          <p:cNvPr id="204" name="Text 202"/>
+          <p:cNvPr id="203" name="Text 201"/>
           <p:cNvSpPr txBox="1"/>
           <p:nvPr/>
         </p:nvSpPr>
@@ -20468,7 +20448,7 @@
                 <a:ea typeface="Poppins" pitchFamily="34" charset="-122"/>
                 <a:cs typeface="Poppins" pitchFamily="34" charset="-120"/>
               </a:rPr>
-              <a:t>~92/wk</a:t>
+              <a:t>~136/wk</a:t>
             </a:r>
             <a:endParaRPr lang="en-US" sz="750" dirty="0"/>
           </a:p>
@@ -20476,7 +20456,7 @@
       </p:sp>
       <p:sp>
         <p:nvSpPr>
-          <p:cNvPr id="205" name="Text 203"/>
+          <p:cNvPr id="204" name="Text 202"/>
           <p:cNvSpPr txBox="1"/>
           <p:nvPr/>
         </p:nvSpPr>
@@ -20515,7 +20495,7 @@
       </p:sp>
       <p:sp>
         <p:nvSpPr>
-          <p:cNvPr id="206" name="Text 204"/>
+          <p:cNvPr id="205" name="Text 203"/>
           <p:cNvSpPr txBox="1"/>
           <p:nvPr/>
         </p:nvSpPr>
@@ -20546,7 +20526,7 @@
                 <a:ea typeface="Poppins" pitchFamily="34" charset="-122"/>
                 <a:cs typeface="Poppins" pitchFamily="34" charset="-120"/>
               </a:rPr>
-              <a:t>▲ +2</a:t>
+              <a:t>▲ +3</a:t>
             </a:r>
             <a:endParaRPr lang="en-US" sz="680" dirty="0"/>
           </a:p>
@@ -20554,7 +20534,7 @@
       </p:sp>
       <p:sp>
         <p:nvSpPr>
-          <p:cNvPr id="207" name="Text 205"/>
+          <p:cNvPr id="206" name="Text 204"/>
           <p:cNvSpPr txBox="1"/>
           <p:nvPr/>
         </p:nvSpPr>
@@ -20585,7 +20565,7 @@
                 <a:ea typeface="Poppins" pitchFamily="34" charset="-122"/>
                 <a:cs typeface="Poppins" pitchFamily="34" charset="-120"/>
               </a:rPr>
-              <a:t>~18/wk</a:t>
+              <a:t>~21/wk</a:t>
             </a:r>
             <a:endParaRPr lang="en-US" sz="750" dirty="0"/>
           </a:p>
@@ -20593,7 +20573,7 @@
       </p:sp>
       <p:sp>
         <p:nvSpPr>
-          <p:cNvPr id="208" name="Text 206"/>
+          <p:cNvPr id="207" name="Text 205"/>
           <p:cNvSpPr txBox="1"/>
           <p:nvPr/>
         </p:nvSpPr>
@@ -20632,7 +20612,7 @@
       </p:sp>
       <p:sp>
         <p:nvSpPr>
-          <p:cNvPr id="209" name="Text 207"/>
+          <p:cNvPr id="208" name="Text 206"/>
           <p:cNvSpPr txBox="1"/>
           <p:nvPr/>
         </p:nvSpPr>
@@ -20663,7 +20643,7 @@
                 <a:ea typeface="Poppins" pitchFamily="34" charset="-122"/>
                 <a:cs typeface="Poppins" pitchFamily="34" charset="-120"/>
               </a:rPr>
-              <a:t>▲ +1</a:t>
+              <a:t>▲ +4</a:t>
             </a:r>
             <a:endParaRPr lang="en-US" sz="680" dirty="0"/>
           </a:p>
@@ -20671,7 +20651,7 @@
       </p:sp>
       <p:sp>
         <p:nvSpPr>
-          <p:cNvPr id="210" name="Text 208"/>
+          <p:cNvPr id="209" name="Text 207"/>
           <p:cNvSpPr txBox="1"/>
           <p:nvPr/>
         </p:nvSpPr>
@@ -20702,7 +20682,7 @@
                 <a:ea typeface="Poppins" pitchFamily="34" charset="-122"/>
                 <a:cs typeface="Poppins" pitchFamily="34" charset="-120"/>
               </a:rPr>
-              <a:t>~16/wk</a:t>
+              <a:t>~20/wk</a:t>
             </a:r>
             <a:endParaRPr lang="en-US" sz="750" dirty="0"/>
           </a:p>
@@ -20710,7 +20690,7 @@
       </p:sp>
       <p:sp>
         <p:nvSpPr>
-          <p:cNvPr id="211" name="Text 209"/>
+          <p:cNvPr id="210" name="Text 208"/>
           <p:cNvSpPr txBox="1"/>
           <p:nvPr/>
         </p:nvSpPr>
@@ -20749,7 +20729,7 @@
       </p:sp>
       <p:sp>
         <p:nvSpPr>
-          <p:cNvPr id="212" name="Text 210"/>
+          <p:cNvPr id="211" name="Text 209"/>
           <p:cNvSpPr txBox="1"/>
           <p:nvPr/>
         </p:nvSpPr>
@@ -20774,13 +20754,13 @@
             <a:r>
               <a:rPr lang="en-US" sz="680" b="1" dirty="0">
                 <a:solidFill>
-                  <a:srgbClr val="3D8F5F"/>
-                </a:solidFill>
-                <a:latin typeface="Poppins" pitchFamily="34" charset="0"/>
-                <a:ea typeface="Poppins" pitchFamily="34" charset="-122"/>
-                <a:cs typeface="Poppins" pitchFamily="34" charset="-120"/>
-              </a:rPr>
-              <a:t>▲ +1</a:t>
+                  <a:srgbClr val="B4552D"/>
+                </a:solidFill>
+                <a:latin typeface="Poppins" pitchFamily="34" charset="0"/>
+                <a:ea typeface="Poppins" pitchFamily="34" charset="-122"/>
+                <a:cs typeface="Poppins" pitchFamily="34" charset="-120"/>
+              </a:rPr>
+              <a:t>▼ -1</a:t>
             </a:r>
             <a:endParaRPr lang="en-US" sz="680" dirty="0"/>
           </a:p>
@@ -20788,7 +20768,7 @@
       </p:sp>
       <p:sp>
         <p:nvSpPr>
-          <p:cNvPr id="213" name="Text 211"/>
+          <p:cNvPr id="212" name="Text 210"/>
           <p:cNvSpPr txBox="1"/>
           <p:nvPr/>
         </p:nvSpPr>
@@ -20819,7 +20799,7 @@
                 <a:ea typeface="Poppins" pitchFamily="34" charset="-122"/>
                 <a:cs typeface="Poppins" pitchFamily="34" charset="-120"/>
               </a:rPr>
-              <a:t>~14/wk</a:t>
+              <a:t>~13/wk</a:t>
             </a:r>
             <a:endParaRPr lang="en-US" sz="750" dirty="0"/>
           </a:p>
@@ -20827,7 +20807,7 @@
       </p:sp>
       <p:sp>
         <p:nvSpPr>
-          <p:cNvPr id="214" name="Text 212"/>
+          <p:cNvPr id="213" name="Text 211"/>
           <p:cNvSpPr txBox="1"/>
           <p:nvPr/>
         </p:nvSpPr>
@@ -20858,7 +20838,7 @@
                 <a:ea typeface="Poppins" pitchFamily="34" charset="-122"/>
                 <a:cs typeface="Poppins" pitchFamily="34" charset="-120"/>
               </a:rPr>
-              <a:t>Katherine Fenwick</a:t>
+              <a:t>Matt Freeman</a:t>
             </a:r>
             <a:endParaRPr lang="en-US" sz="750" dirty="0"/>
           </a:p>
@@ -20866,7 +20846,7 @@
       </p:sp>
       <p:sp>
         <p:nvSpPr>
-          <p:cNvPr id="215" name="Text 213"/>
+          <p:cNvPr id="214" name="Text 212"/>
           <p:cNvSpPr txBox="1"/>
           <p:nvPr/>
         </p:nvSpPr>
@@ -20891,13 +20871,13 @@
             <a:r>
               <a:rPr lang="en-US" sz="680" b="1" dirty="0">
                 <a:solidFill>
-                  <a:srgbClr val="B4552D"/>
-                </a:solidFill>
-                <a:latin typeface="Poppins" pitchFamily="34" charset="0"/>
-                <a:ea typeface="Poppins" pitchFamily="34" charset="-122"/>
-                <a:cs typeface="Poppins" pitchFamily="34" charset="-120"/>
-              </a:rPr>
-              <a:t>▼ -2</a:t>
+                  <a:srgbClr val="3D8F5F"/>
+                </a:solidFill>
+                <a:latin typeface="Poppins" pitchFamily="34" charset="0"/>
+                <a:ea typeface="Poppins" pitchFamily="34" charset="-122"/>
+                <a:cs typeface="Poppins" pitchFamily="34" charset="-120"/>
+              </a:rPr>
+              <a:t>▲ +1</a:t>
             </a:r>
             <a:endParaRPr lang="en-US" sz="680" dirty="0"/>
           </a:p>
@@ -20905,7 +20885,7 @@
       </p:sp>
       <p:sp>
         <p:nvSpPr>
-          <p:cNvPr id="216" name="Text 214"/>
+          <p:cNvPr id="215" name="Text 213"/>
           <p:cNvSpPr txBox="1"/>
           <p:nvPr/>
         </p:nvSpPr>
@@ -20936,7 +20916,7 @@
                 <a:ea typeface="Poppins" pitchFamily="34" charset="-122"/>
                 <a:cs typeface="Poppins" pitchFamily="34" charset="-120"/>
               </a:rPr>
-              <a:t>~12/wk</a:t>
+              <a:t>~13/wk</a:t>
             </a:r>
             <a:endParaRPr lang="en-US" sz="750" dirty="0"/>
           </a:p>
@@ -20944,7 +20924,7 @@
       </p:sp>
       <p:sp>
         <p:nvSpPr>
-          <p:cNvPr id="217" name="Text 215"/>
+          <p:cNvPr id="216" name="Text 214"/>
           <p:cNvSpPr txBox="1"/>
           <p:nvPr/>
         </p:nvSpPr>
@@ -20975,7 +20955,7 @@
                 <a:ea typeface="Poppins" pitchFamily="34" charset="-122"/>
                 <a:cs typeface="Poppins" pitchFamily="34" charset="-120"/>
               </a:rPr>
-              <a:t>Matt Freeman</a:t>
+              <a:t>Katherine Fenwick</a:t>
             </a:r>
             <a:endParaRPr lang="en-US" sz="750" dirty="0"/>
           </a:p>
@@ -20983,7 +20963,7 @@
       </p:sp>
       <p:sp>
         <p:nvSpPr>
-          <p:cNvPr id="218" name="Text 216"/>
+          <p:cNvPr id="217" name="Text 215"/>
           <p:cNvSpPr txBox="1"/>
           <p:nvPr/>
         </p:nvSpPr>
@@ -21008,13 +20988,13 @@
             <a:r>
               <a:rPr lang="en-US" sz="680" b="1" dirty="0">
                 <a:solidFill>
-                  <a:srgbClr val="B4552D"/>
-                </a:solidFill>
-                <a:latin typeface="Poppins" pitchFamily="34" charset="0"/>
-                <a:ea typeface="Poppins" pitchFamily="34" charset="-122"/>
-                <a:cs typeface="Poppins" pitchFamily="34" charset="-120"/>
-              </a:rPr>
-              <a:t>▼ -5</a:t>
+                  <a:srgbClr val="8FA1AC"/>
+                </a:solidFill>
+                <a:latin typeface="Poppins" pitchFamily="34" charset="0"/>
+                <a:ea typeface="Poppins" pitchFamily="34" charset="-122"/>
+                <a:cs typeface="Poppins" pitchFamily="34" charset="-120"/>
+              </a:rPr>
+              <a:t>—</a:t>
             </a:r>
             <a:endParaRPr lang="en-US" sz="680" dirty="0"/>
           </a:p>
@@ -21022,7 +21002,7 @@
       </p:sp>
       <p:sp>
         <p:nvSpPr>
-          <p:cNvPr id="219" name="Text 217"/>
+          <p:cNvPr id="218" name="Text 216"/>
           <p:cNvSpPr txBox="1"/>
           <p:nvPr/>
         </p:nvSpPr>
@@ -21061,7 +21041,7 @@
       </p:sp>
       <p:sp>
         <p:nvSpPr>
-          <p:cNvPr id="220" name="Text 218"/>
+          <p:cNvPr id="219" name="Text 217"/>
           <p:cNvSpPr txBox="1"/>
           <p:nvPr/>
         </p:nvSpPr>
@@ -21100,7 +21080,7 @@
       </p:sp>
       <p:sp>
         <p:nvSpPr>
-          <p:cNvPr id="221" name="Text 219"/>
+          <p:cNvPr id="220" name="Text 218"/>
           <p:cNvSpPr txBox="1"/>
           <p:nvPr/>
         </p:nvSpPr>
@@ -21131,7 +21111,7 @@
                 <a:ea typeface="Poppins" pitchFamily="34" charset="-122"/>
                 <a:cs typeface="Poppins" pitchFamily="34" charset="-120"/>
               </a:rPr>
-              <a:t>▲ +4</a:t>
+              <a:t>▲ +1</a:t>
             </a:r>
             <a:endParaRPr lang="en-US" sz="680" dirty="0"/>
           </a:p>
@@ -21139,7 +21119,7 @@
       </p:sp>
       <p:sp>
         <p:nvSpPr>
-          <p:cNvPr id="222" name="Text 220"/>
+          <p:cNvPr id="221" name="Text 219"/>
           <p:cNvSpPr txBox="1"/>
           <p:nvPr/>
         </p:nvSpPr>
@@ -21170,7 +21150,7 @@
                 <a:ea typeface="Poppins" pitchFamily="34" charset="-122"/>
                 <a:cs typeface="Poppins" pitchFamily="34" charset="-120"/>
               </a:rPr>
-              <a:t>~10/wk</a:t>
+              <a:t>~11/wk</a:t>
             </a:r>
             <a:endParaRPr lang="en-US" sz="750" dirty="0"/>
           </a:p>
@@ -21178,7 +21158,7 @@
       </p:sp>
       <p:sp>
         <p:nvSpPr>
-          <p:cNvPr id="223" name="Text 221"/>
+          <p:cNvPr id="222" name="Text 220"/>
           <p:cNvSpPr txBox="1"/>
           <p:nvPr/>
         </p:nvSpPr>
@@ -21209,7 +21189,7 @@
                 <a:ea typeface="Poppins" pitchFamily="34" charset="-122"/>
                 <a:cs typeface="Poppins" pitchFamily="34" charset="-120"/>
               </a:rPr>
-              <a:t>Youssef Medhat</a:t>
+              <a:t>Mostafa Essa</a:t>
             </a:r>
             <a:endParaRPr lang="en-US" sz="750" dirty="0"/>
           </a:p>
@@ -21217,7 +21197,7 @@
       </p:sp>
       <p:sp>
         <p:nvSpPr>
-          <p:cNvPr id="224" name="Text 222"/>
+          <p:cNvPr id="223" name="Text 221"/>
           <p:cNvSpPr txBox="1"/>
           <p:nvPr/>
         </p:nvSpPr>
@@ -21242,13 +21222,13 @@
             <a:r>
               <a:rPr lang="en-US" sz="680" b="1" dirty="0">
                 <a:solidFill>
-                  <a:srgbClr val="8FA1AC"/>
-                </a:solidFill>
-                <a:latin typeface="Poppins" pitchFamily="34" charset="0"/>
-                <a:ea typeface="Poppins" pitchFamily="34" charset="-122"/>
-                <a:cs typeface="Poppins" pitchFamily="34" charset="-120"/>
-              </a:rPr>
-              <a:t>—</a:t>
+                  <a:srgbClr val="3D8F5F"/>
+                </a:solidFill>
+                <a:latin typeface="Poppins" pitchFamily="34" charset="0"/>
+                <a:ea typeface="Poppins" pitchFamily="34" charset="-122"/>
+                <a:cs typeface="Poppins" pitchFamily="34" charset="-120"/>
+              </a:rPr>
+              <a:t>▲ +1</a:t>
             </a:r>
             <a:endParaRPr lang="en-US" sz="680" dirty="0"/>
           </a:p>
@@ -21256,7 +21236,7 @@
       </p:sp>
       <p:sp>
         <p:nvSpPr>
-          <p:cNvPr id="225" name="Text 223"/>
+          <p:cNvPr id="224" name="Text 222"/>
           <p:cNvSpPr txBox="1"/>
           <p:nvPr/>
         </p:nvSpPr>
@@ -21287,7 +21267,7 @@
                 <a:ea typeface="Poppins" pitchFamily="34" charset="-122"/>
                 <a:cs typeface="Poppins" pitchFamily="34" charset="-120"/>
               </a:rPr>
-              <a:t>~7/wk</a:t>
+              <a:t>~8/wk</a:t>
             </a:r>
             <a:endParaRPr lang="en-US" sz="750" dirty="0"/>
           </a:p>
@@ -21295,7 +21275,7 @@
       </p:sp>
       <p:sp>
         <p:nvSpPr>
-          <p:cNvPr id="226" name="Text 224"/>
+          <p:cNvPr id="225" name="Text 223"/>
           <p:cNvSpPr txBox="1"/>
           <p:nvPr/>
         </p:nvSpPr>
@@ -21334,7 +21314,7 @@
       </p:sp>
       <p:sp>
         <p:nvSpPr>
-          <p:cNvPr id="227" name="Text 225"/>
+          <p:cNvPr id="226" name="Text 224"/>
           <p:cNvSpPr txBox="1"/>
           <p:nvPr/>
         </p:nvSpPr>
@@ -21365,7 +21345,7 @@
                 <a:ea typeface="Poppins" pitchFamily="34" charset="-122"/>
                 <a:cs typeface="Poppins" pitchFamily="34" charset="-120"/>
               </a:rPr>
-              <a:t>new</a:t>
+              <a:t>—</a:t>
             </a:r>
             <a:endParaRPr lang="en-US" sz="680" dirty="0"/>
           </a:p>
@@ -21373,7 +21353,7 @@
       </p:sp>
       <p:sp>
         <p:nvSpPr>
-          <p:cNvPr id="228" name="Text 226"/>
+          <p:cNvPr id="227" name="Text 225"/>
           <p:cNvSpPr txBox="1"/>
           <p:nvPr/>
         </p:nvSpPr>
@@ -21412,7 +21392,7 @@
       </p:sp>
       <p:sp>
         <p:nvSpPr>
-          <p:cNvPr id="229" name="Text 227"/>
+          <p:cNvPr id="228" name="Text 226"/>
           <p:cNvSpPr txBox="1"/>
           <p:nvPr/>
         </p:nvSpPr>
@@ -21451,7 +21431,7 @@
       </p:sp>
       <p:sp>
         <p:nvSpPr>
-          <p:cNvPr id="230" name="Shape 228"/>
+          <p:cNvPr id="229" name="Shape 227"/>
           <p:cNvSpPr/>
           <p:nvPr/>
         </p:nvSpPr>
@@ -21480,7 +21460,7 @@
       </p:sp>
       <p:sp>
         <p:nvSpPr>
-          <p:cNvPr id="231" name="Text 229"/>
+          <p:cNvPr id="230" name="Text 228"/>
           <p:cNvSpPr txBox="1"/>
           <p:nvPr/>
         </p:nvSpPr>
@@ -21519,7 +21499,7 @@
       </p:sp>
       <p:sp>
         <p:nvSpPr>
-          <p:cNvPr id="232" name="Text 230"/>
+          <p:cNvPr id="231" name="Text 229"/>
           <p:cNvSpPr txBox="1"/>
           <p:nvPr/>
         </p:nvSpPr>
@@ -21564,7 +21544,7 @@
                 <a:ea typeface="Poppins" pitchFamily="34" charset="-122"/>
                 <a:cs typeface="Poppins" pitchFamily="34" charset="-120"/>
               </a:rPr>
-              <a:t>37 of 47 active weekly (10 daily) </a:t>
+              <a:t>39 of 46 active weekly (19 daily) </a:t>
             </a:r>
             <a:pPr indent="0" marL="0">
               <a:spcAft>
@@ -21581,7 +21561,7 @@
                 <a:ea typeface="Poppins" pitchFamily="34" charset="-122"/>
                 <a:cs typeface="Poppins" pitchFamily="34" charset="-120"/>
               </a:rPr>
-              <a:t>— Cowork is the stickiest surface at 23% DAU/MAU against Claude Code's 12%. September code output stands at 277,261 lines, 176,102 of them since the 20 Sep capture, with Nicolas Ibrahim on 99,693 alone. Bjorn Magabo alone logged 1,050 Cowork sessions in 30 days against 1,126 messages — roughly one message per session, so read it as very short repeated sessions, not depth of use.</a:t>
+              <a:t>— daily actives nearly doubled, 19 against 10 a week ago. Cowork is the stickiest surface at 33% DAU/MAU, Claude.ai has jumped to 29% and Office Agents are live at 11%. October code output is 50,453 lines in six days, 39,709 of them Nicolas Ibrahim. Bjorn Magabo logged 2,085 Cowork sessions in 30 days against 2,187 messages — about one message each, so read it as very short repeated sessions.</a:t>
             </a:r>
             <a:endParaRPr lang="en-US" sz="900" dirty="0"/>
           </a:p>
@@ -21589,14 +21569,14 @@
       </p:sp>
       <p:sp>
         <p:nvSpPr>
-          <p:cNvPr id="233" name="Shape 231"/>
-          <p:cNvSpPr/>
-          <p:nvPr/>
-        </p:nvSpPr>
-        <p:spPr>
-          <a:xfrm>
-            <a:off x="7212787" y="6510528"/>
-            <a:ext cx="4564685" cy="256032"/>
+          <p:cNvPr id="232" name="Shape 230"/>
+          <p:cNvSpPr/>
+          <p:nvPr/>
+        </p:nvSpPr>
+        <p:spPr>
+          <a:xfrm>
+            <a:off x="8394192" y="6510528"/>
+            <a:ext cx="3383280" cy="256032"/>
           </a:xfrm>
           <a:prstGeom prst="roundRect">
             <a:avLst>
@@ -21611,14 +21591,14 @@
       </p:sp>
       <p:sp>
         <p:nvSpPr>
-          <p:cNvPr id="234" name="Text 232"/>
-          <p:cNvSpPr txBox="1"/>
-          <p:nvPr/>
-        </p:nvSpPr>
-        <p:spPr>
-          <a:xfrm>
-            <a:off x="7212787" y="6510528"/>
-            <a:ext cx="4564685" cy="256032"/>
+          <p:cNvPr id="233" name="Text 231"/>
+          <p:cNvSpPr txBox="1"/>
+          <p:nvPr/>
+        </p:nvSpPr>
+        <p:spPr>
+          <a:xfrm>
+            <a:off x="8394192" y="6510528"/>
+            <a:ext cx="3383280" cy="256032"/>
           </a:xfrm>
           <a:prstGeom prst="rect">
             <a:avLst/>
@@ -21642,7 +21622,7 @@
                 <a:ea typeface="Poppins" pitchFamily="34" charset="-122"/>
                 <a:cs typeface="Poppins" pitchFamily="34" charset="-120"/>
               </a:rPr>
-              <a:t>Source: Claude Admin weekly capture (30d to 27 Sep) — refresh pending</a:t>
+              <a:t>Source: Claude Admin weekly capture (30d to 5 Oct)</a:t>
             </a:r>
             <a:endParaRPr lang="en-US" sz="700" dirty="0"/>
           </a:p>
@@ -25975,7 +25955,7 @@
                 <a:ea typeface="Poppins" pitchFamily="34" charset="-122"/>
                 <a:cs typeface="Poppins" pitchFamily="34" charset="-120"/>
               </a:rPr>
-              <a:t>AI-draft adoption 4.5% this week (5 of 110) — best week since cutover, 3 sent as-is</a:t>
+              <a:t>39 of 46 active weekly, 19 daily — daily use nearly doubled; Cowork stickiest at 33% DAU/MAU and Office Agents live at 11%</a:t>
             </a:r>
             <a:endParaRPr lang="en-US" sz="900" dirty="0"/>
           </a:p>
